--- a/harness/out/pptx/pitch_deck/cold/deck.pptx
+++ b/harness/out/pptx/pitch_deck/cold/deck.pptx
@@ -3117,15 +3117,15 @@
           <a:noFill/>
         </p:spPr>
         <p:txBody>
-          <a:bodyPr wrap="none">
+          <a:bodyPr wrap="square">
             <a:spAutoFit/>
           </a:bodyPr>
           <a:lstStyle/>
           <a:p>
             <a:pPr algn="ctr">
-              <a:defRPr sz="8800" b="1">
+              <a:defRPr sz="7200" b="1">
                 <a:solidFill>
-                  <a:srgbClr val="007896"/>
+                  <a:srgbClr val="009688"/>
                 </a:solidFill>
                 <a:latin typeface="Calibri"/>
               </a:defRPr>
@@ -3145,7 +3145,7 @@
         <p:spPr>
           <a:xfrm>
             <a:off x="457200" y="3840480"/>
-            <a:ext cx="8229600" cy="1371600"/>
+            <a:ext cx="8229600" cy="914400"/>
           </a:xfrm>
           <a:prstGeom prst="rect">
             <a:avLst/>
@@ -3161,7 +3161,7 @@
             <a:pPr algn="ctr">
               <a:defRPr sz="3200">
                 <a:solidFill>
-                  <a:srgbClr val="646464"/>
+                  <a:srgbClr val="1E1E1E"/>
                 </a:solidFill>
                 <a:latin typeface="Calibri"/>
               </a:defRPr>
@@ -3206,8 +3206,8 @@
         </p:nvSpPr>
         <p:spPr>
           <a:xfrm>
-            <a:off x="457200" y="457200"/>
-            <a:ext cx="8229600" cy="914400"/>
+            <a:off x="685800" y="457200"/>
+            <a:ext cx="7772400" cy="914400"/>
           </a:xfrm>
           <a:prstGeom prst="rect">
             <a:avLst/>
@@ -3215,7 +3215,7 @@
           <a:noFill/>
         </p:spPr>
         <p:txBody>
-          <a:bodyPr wrap="none">
+          <a:bodyPr wrap="square">
             <a:spAutoFit/>
           </a:bodyPr>
           <a:lstStyle/>
@@ -3223,7 +3223,7 @@
             <a:pPr>
               <a:defRPr sz="5400" b="1">
                 <a:solidFill>
-                  <a:srgbClr val="282828"/>
+                  <a:srgbClr val="009688"/>
                 </a:solidFill>
                 <a:latin typeface="Calibri"/>
               </a:defRPr>
@@ -3242,8 +3242,8 @@
         </p:nvSpPr>
         <p:spPr>
           <a:xfrm>
-            <a:off x="914400" y="1828800"/>
-            <a:ext cx="7315200" cy="4114800"/>
+            <a:off x="1371600" y="1645920"/>
+            <a:ext cx="7315200" cy="4572000"/>
           </a:xfrm>
           <a:prstGeom prst="rect">
             <a:avLst/>
@@ -3265,13 +3265,13 @@
               </a:spcAft>
               <a:defRPr sz="2800">
                 <a:solidFill>
-                  <a:srgbClr val="282828"/>
+                  <a:srgbClr val="1E1E1E"/>
                 </a:solidFill>
                 <a:latin typeface="Calibri"/>
               </a:defRPr>
             </a:pPr>
             <a:r>
-              <a:t>Large test suites are slow and hard to navigate.</a:t>
+              <a:t>Large suites are slow and opaque</a:t>
             </a:r>
           </a:p>
           <a:p>
@@ -3284,11 +3284,14 @@
               </a:spcAft>
               <a:defRPr sz="2800">
                 <a:solidFill>
-                  <a:srgbClr val="282828"/>
+                  <a:srgbClr val="1E1E1E"/>
                 </a:solidFill>
                 <a:latin typeface="Calibri"/>
               </a:defRPr>
             </a:pPr>
+            <a:r>
+              <a:t>Nobody knows which tests cover which code</a:t>
+            </a:r>
           </a:p>
           <a:p>
             <a:pPr>
@@ -3300,48 +3303,13 @@
               </a:spcAft>
               <a:defRPr sz="2800">
                 <a:solidFill>
-                  <a:srgbClr val="282828"/>
+                  <a:srgbClr val="1E1E1E"/>
                 </a:solidFill>
                 <a:latin typeface="Calibri"/>
               </a:defRPr>
             </a:pPr>
             <a:r>
-              <a:t>Nobody knows which tests cover which code.</a:t>
-            </a:r>
-          </a:p>
-          <a:p>
-            <a:pPr>
-              <a:spcBef>
-                <a:spcPts val="1200"/>
-              </a:spcBef>
-              <a:spcAft>
-                <a:spcPts val="1200"/>
-              </a:spcAft>
-              <a:defRPr sz="2800">
-                <a:solidFill>
-                  <a:srgbClr val="282828"/>
-                </a:solidFill>
-                <a:latin typeface="Calibri"/>
-              </a:defRPr>
-            </a:pPr>
-          </a:p>
-          <a:p>
-            <a:pPr>
-              <a:spcBef>
-                <a:spcPts val="1200"/>
-              </a:spcBef>
-              <a:spcAft>
-                <a:spcPts val="1200"/>
-              </a:spcAft>
-              <a:defRPr sz="2800">
-                <a:solidFill>
-                  <a:srgbClr val="282828"/>
-                </a:solidFill>
-                <a:latin typeface="Calibri"/>
-              </a:defRPr>
-            </a:pPr>
-            <a:r>
-              <a:t>Dead tests linger. Real gaps go unnoticed.</a:t>
+              <a:t>Dead tests linger, real gaps go unnoticed</a:t>
             </a:r>
           </a:p>
         </p:txBody>
@@ -3380,8 +3348,8 @@
         </p:nvSpPr>
         <p:spPr>
           <a:xfrm>
-            <a:off x="457200" y="457200"/>
-            <a:ext cx="8229600" cy="914400"/>
+            <a:off x="685800" y="457200"/>
+            <a:ext cx="7772400" cy="914400"/>
           </a:xfrm>
           <a:prstGeom prst="rect">
             <a:avLst/>
@@ -3389,7 +3357,7 @@
           <a:noFill/>
         </p:spPr>
         <p:txBody>
-          <a:bodyPr wrap="none">
+          <a:bodyPr wrap="square">
             <a:spAutoFit/>
           </a:bodyPr>
           <a:lstStyle/>
@@ -3397,7 +3365,7 @@
             <a:pPr>
               <a:defRPr sz="5400" b="1">
                 <a:solidFill>
-                  <a:srgbClr val="282828"/>
+                  <a:srgbClr val="009688"/>
                 </a:solidFill>
                 <a:latin typeface="Calibri"/>
               </a:defRPr>
@@ -3416,8 +3384,8 @@
         </p:nvSpPr>
         <p:spPr>
           <a:xfrm>
-            <a:off x="914400" y="1828800"/>
-            <a:ext cx="7315200" cy="4114800"/>
+            <a:off x="1371600" y="1645920"/>
+            <a:ext cx="7315200" cy="4572000"/>
           </a:xfrm>
           <a:prstGeom prst="rect">
             <a:avLst/>
@@ -3439,13 +3407,13 @@
               </a:spcAft>
               <a:defRPr sz="2800">
                 <a:solidFill>
-                  <a:srgbClr val="282828"/>
+                  <a:srgbClr val="1E1E1E"/>
                 </a:solidFill>
                 <a:latin typeface="Calibri"/>
               </a:defRPr>
             </a:pPr>
             <a:r>
-              <a:t>Marrow instruments a single test run.</a:t>
+              <a:t>Instruments a single test run</a:t>
             </a:r>
           </a:p>
           <a:p>
@@ -3458,11 +3426,14 @@
               </a:spcAft>
               <a:defRPr sz="2800">
                 <a:solidFill>
-                  <a:srgbClr val="282828"/>
+                  <a:srgbClr val="1E1E1E"/>
                 </a:solidFill>
                 <a:latin typeface="Calibri"/>
               </a:defRPr>
             </a:pPr>
+            <a:r>
+              <a:t>Produces a test→code coverage map</a:t>
+            </a:r>
           </a:p>
           <a:p>
             <a:pPr>
@@ -3474,48 +3445,13 @@
               </a:spcAft>
               <a:defRPr sz="2800">
                 <a:solidFill>
-                  <a:srgbClr val="282828"/>
+                  <a:srgbClr val="1E1E1E"/>
                 </a:solidFill>
                 <a:latin typeface="Calibri"/>
               </a:defRPr>
             </a:pPr>
             <a:r>
-              <a:t>Produces a test → code coverage map.</a:t>
-            </a:r>
-          </a:p>
-          <a:p>
-            <a:pPr>
-              <a:spcBef>
-                <a:spcPts val="1200"/>
-              </a:spcBef>
-              <a:spcAft>
-                <a:spcPts val="1200"/>
-              </a:spcAft>
-              <a:defRPr sz="2800">
-                <a:solidFill>
-                  <a:srgbClr val="282828"/>
-                </a:solidFill>
-                <a:latin typeface="Calibri"/>
-              </a:defRPr>
-            </a:pPr>
-          </a:p>
-          <a:p>
-            <a:pPr>
-              <a:spcBef>
-                <a:spcPts val="1200"/>
-              </a:spcBef>
-              <a:spcAft>
-                <a:spcPts val="1200"/>
-              </a:spcAft>
-              <a:defRPr sz="2800">
-                <a:solidFill>
-                  <a:srgbClr val="282828"/>
-                </a:solidFill>
-                <a:latin typeface="Calibri"/>
-              </a:defRPr>
-            </a:pPr>
-            <a:r>
-              <a:t>No annotations. No config.</a:t>
+              <a:t>No annotations, no config</a:t>
             </a:r>
           </a:p>
         </p:txBody>
@@ -3554,8 +3490,8 @@
         </p:nvSpPr>
         <p:spPr>
           <a:xfrm>
-            <a:off x="457200" y="457200"/>
-            <a:ext cx="8229600" cy="731520"/>
+            <a:off x="685800" y="457200"/>
+            <a:ext cx="7772400" cy="914400"/>
           </a:xfrm>
           <a:prstGeom prst="rect">
             <a:avLst/>
@@ -3563,7 +3499,7 @@
           <a:noFill/>
         </p:spPr>
         <p:txBody>
-          <a:bodyPr wrap="none">
+          <a:bodyPr wrap="square">
             <a:spAutoFit/>
           </a:bodyPr>
           <a:lstStyle/>
@@ -3571,7 +3507,7 @@
             <a:pPr>
               <a:defRPr sz="5400" b="1">
                 <a:solidFill>
-                  <a:srgbClr val="282828"/>
+                  <a:srgbClr val="009688"/>
                 </a:solidFill>
                 <a:latin typeface="Calibri"/>
               </a:defRPr>
@@ -3590,7 +3526,7 @@
         </p:nvSpPr>
         <p:spPr>
           <a:xfrm>
-            <a:off x="914400" y="1463040"/>
+            <a:off x="1371600" y="1645920"/>
             <a:ext cx="7315200" cy="4572000"/>
           </a:xfrm>
           <a:prstGeom prst="rect">
@@ -3606,109 +3542,58 @@
           <a:p>
             <a:pPr>
               <a:spcBef>
-                <a:spcPts val="1000"/>
+                <a:spcPts val="1200"/>
               </a:spcBef>
               <a:spcAft>
-                <a:spcPts val="1000"/>
+                <a:spcPts val="1200"/>
               </a:spcAft>
-              <a:defRPr sz="2400">
+              <a:defRPr sz="2800">
                 <a:solidFill>
-                  <a:srgbClr val="282828"/>
+                  <a:srgbClr val="1E1E1E"/>
                 </a:solidFill>
                 <a:latin typeface="Calibri"/>
               </a:defRPr>
             </a:pPr>
             <a:r>
-              <a:t>1. Run: marrow watch -- &lt;your test cmd&gt;</a:t>
+              <a:t>Run: marrow watch -- &lt;your test cmd&gt;</a:t>
             </a:r>
           </a:p>
           <a:p>
             <a:pPr>
               <a:spcBef>
-                <a:spcPts val="1000"/>
+                <a:spcPts val="1200"/>
               </a:spcBef>
               <a:spcAft>
-                <a:spcPts val="1000"/>
+                <a:spcPts val="1200"/>
               </a:spcAft>
-              <a:defRPr sz="2400">
+              <a:defRPr sz="2800">
                 <a:solidFill>
-                  <a:srgbClr val="282828"/>
+                  <a:srgbClr val="1E1E1E"/>
                 </a:solidFill>
                 <a:latin typeface="Calibri"/>
               </a:defRPr>
             </a:pPr>
+            <a:r>
+              <a:t>Records which lines each test exercised</a:t>
+            </a:r>
           </a:p>
           <a:p>
             <a:pPr>
               <a:spcBef>
-                <a:spcPts val="1000"/>
+                <a:spcPts val="1200"/>
               </a:spcBef>
               <a:spcAft>
-                <a:spcPts val="1000"/>
+                <a:spcPts val="1200"/>
               </a:spcAft>
-              <a:defRPr sz="2400">
+              <a:defRPr sz="2800">
                 <a:solidFill>
-                  <a:srgbClr val="282828"/>
+                  <a:srgbClr val="1E1E1E"/>
                 </a:solidFill>
                 <a:latin typeface="Calibri"/>
               </a:defRPr>
             </a:pPr>
             <a:r>
-              <a:t>2. Marrow records which lines each test exercised</a:t>
-            </a:r>
-          </a:p>
-          <a:p>
-            <a:pPr>
-              <a:spcBef>
-                <a:spcPts val="1000"/>
-              </a:spcBef>
-              <a:spcAft>
-                <a:spcPts val="1000"/>
-              </a:spcAft>
-              <a:defRPr sz="2400">
-                <a:solidFill>
-                  <a:srgbClr val="282828"/>
-                </a:solidFill>
-                <a:latin typeface="Calibri"/>
-              </a:defRPr>
-            </a:pPr>
-          </a:p>
-          <a:p>
-            <a:pPr>
-              <a:spcBef>
-                <a:spcPts val="1000"/>
-              </a:spcBef>
-              <a:spcAft>
-                <a:spcPts val="1000"/>
-              </a:spcAft>
-              <a:defRPr sz="2400">
-                <a:solidFill>
-                  <a:srgbClr val="282828"/>
-                </a:solidFill>
-                <a:latin typeface="Calibri"/>
-              </a:defRPr>
-            </a:pPr>
-            <a:r>
-              <a:t>3. Emits an interactive map, lists dead tests</a:t>
-            </a:r>
-          </a:p>
-          <a:p>
-            <a:pPr>
-              <a:spcBef>
-                <a:spcPts val="1000"/>
-              </a:spcBef>
-              <a:spcAft>
-                <a:spcPts val="1000"/>
-              </a:spcAft>
-              <a:defRPr sz="2400">
-                <a:solidFill>
-                  <a:srgbClr val="282828"/>
-                </a:solidFill>
-                <a:latin typeface="Calibri"/>
-              </a:defRPr>
-            </a:pPr>
-            <a:r>
-              <a:t>   and untested lines</a:t>
+              <a:t>Emits interactive map + dead tests + untested lines</a:t>
             </a:r>
           </a:p>
         </p:txBody>
@@ -3747,8 +3632,8 @@
         </p:nvSpPr>
         <p:spPr>
           <a:xfrm>
-            <a:off x="457200" y="914400"/>
-            <a:ext cx="8229600" cy="1097280"/>
+            <a:off x="685800" y="457200"/>
+            <a:ext cx="7772400" cy="914400"/>
           </a:xfrm>
           <a:prstGeom prst="rect">
             <a:avLst/>
@@ -3756,15 +3641,15 @@
           <a:noFill/>
         </p:spPr>
         <p:txBody>
-          <a:bodyPr wrap="none">
+          <a:bodyPr wrap="square">
             <a:spAutoFit/>
           </a:bodyPr>
           <a:lstStyle/>
           <a:p>
-            <a:pPr algn="ctr">
+            <a:pPr>
               <a:defRPr sz="5400" b="1">
                 <a:solidFill>
-                  <a:srgbClr val="282828"/>
+                  <a:srgbClr val="009688"/>
                 </a:solidFill>
                 <a:latin typeface="Calibri"/>
               </a:defRPr>
@@ -3783,8 +3668,8 @@
         </p:nvSpPr>
         <p:spPr>
           <a:xfrm>
-            <a:off x="914400" y="2560320"/>
-            <a:ext cx="7315200" cy="1097280"/>
+            <a:off x="1371600" y="1645920"/>
+            <a:ext cx="7315200" cy="4572000"/>
           </a:xfrm>
           <a:prstGeom prst="rect">
             <a:avLst/>
@@ -3792,57 +3677,46 @@
           <a:noFill/>
         </p:spPr>
         <p:txBody>
-          <a:bodyPr wrap="none">
-            <a:spAutoFit/>
-          </a:bodyPr>
-          <a:lstStyle/>
-          <a:p>
-            <a:pPr algn="ctr">
-              <a:defRPr sz="3600" b="1">
-                <a:solidFill>
-                  <a:srgbClr val="007896"/>
-                </a:solidFill>
-                <a:latin typeface="Courier New"/>
-              </a:defRPr>
-            </a:pPr>
-            <a:r>
-              <a:t>pipx install marrow</a:t>
-            </a:r>
-          </a:p>
-        </p:txBody>
-      </p:sp>
-      <p:sp>
-        <p:nvSpPr>
-          <p:cNvPr id="4" name="TextBox 3"/>
-          <p:cNvSpPr txBox="1"/>
-          <p:nvPr/>
-        </p:nvSpPr>
-        <p:spPr>
-          <a:xfrm>
-            <a:off x="914400" y="4114800"/>
-            <a:ext cx="7315200" cy="1828800"/>
-          </a:xfrm>
-          <a:prstGeom prst="rect">
-            <a:avLst/>
-          </a:prstGeom>
-          <a:noFill/>
-        </p:spPr>
-        <p:txBody>
           <a:bodyPr wrap="square">
             <a:spAutoFit/>
           </a:bodyPr>
           <a:lstStyle/>
           <a:p>
-            <a:pPr algn="ctr">
+            <a:pPr>
+              <a:spcBef>
+                <a:spcPts val="1200"/>
+              </a:spcBef>
+              <a:spcAft>
+                <a:spcPts val="1200"/>
+              </a:spcAft>
               <a:defRPr sz="2800">
                 <a:solidFill>
-                  <a:srgbClr val="646464"/>
+                  <a:srgbClr val="1E1E1E"/>
                 </a:solidFill>
                 <a:latin typeface="Calibri"/>
               </a:defRPr>
             </a:pPr>
             <a:r>
-              <a:t>Works with pytest, Jest, go test.</a:t>
+              <a:t>pipx install marrow</a:t>
+            </a:r>
+          </a:p>
+          <a:p>
+            <a:pPr>
+              <a:spcBef>
+                <a:spcPts val="1200"/>
+              </a:spcBef>
+              <a:spcAft>
+                <a:spcPts val="1200"/>
+              </a:spcAft>
+              <a:defRPr sz="2800">
+                <a:solidFill>
+                  <a:srgbClr val="1E1E1E"/>
+                </a:solidFill>
+                <a:latin typeface="Calibri"/>
+              </a:defRPr>
+            </a:pPr>
+            <a:r>
+              <a:t>Works with pytest, Jest, go test</a:t>
             </a:r>
           </a:p>
         </p:txBody>

--- a/harness/out/pptx/pitch_deck/cold/deck.pptx
+++ b/harness/out/pptx/pitch_deck/cold/deck.pptx
@@ -11,7 +11,7 @@
     <p:sldId id="259" r:id="rId10"/>
     <p:sldId id="260" r:id="rId11"/>
   </p:sldIdLst>
-  <p:sldSz cx="9144000" cy="6858000" type="screen4x3"/>
+  <p:sldSz cx="12191695" cy="6858000" type="screen4x3"/>
   <p:notesSz cx="6858000" cy="9144000"/>
   <p:defaultTextStyle>
     <a:defPPr>
@@ -3085,14 +3085,6 @@
 <file path=ppt/slides/slide1.xml><?xml version="1.0" encoding="utf-8"?>
 <p:sld xmlns:a="http://schemas.openxmlformats.org/drawingml/2006/main" xmlns:p="http://schemas.openxmlformats.org/presentationml/2006/main" xmlns:r="http://schemas.openxmlformats.org/officeDocument/2006/relationships">
   <p:cSld>
-    <p:bg>
-      <p:bgPr>
-        <a:solidFill>
-          <a:srgbClr val="FFFFFF"/>
-        </a:solidFill>
-        <a:effectLst/>
-      </p:bgPr>
-    </p:bg>
     <p:spTree>
       <p:nvGrpSpPr>
         <p:cNvPr id="1" name=""/>
@@ -3102,14 +3094,58 @@
       <p:grpSpPr/>
       <p:sp>
         <p:nvSpPr>
-          <p:cNvPr id="2" name="TextBox 1"/>
+          <p:cNvPr id="2" name="Rectangle 1"/>
+          <p:cNvSpPr/>
+          <p:nvPr/>
+        </p:nvSpPr>
+        <p:spPr>
+          <a:xfrm>
+            <a:off x="0" y="0"/>
+            <a:ext cx="12191695" cy="6858000"/>
+          </a:xfrm>
+          <a:prstGeom prst="rect">
+            <a:avLst/>
+          </a:prstGeom>
+          <a:solidFill>
+            <a:srgbClr val="F7F6F3"/>
+          </a:solidFill>
+          <a:ln>
+            <a:noFill/>
+          </a:ln>
+          <a:effectLst/>
+        </p:spPr>
+        <p:style>
+          <a:lnRef idx="1">
+            <a:schemeClr val="accent1"/>
+          </a:lnRef>
+          <a:fillRef idx="3">
+            <a:schemeClr val="accent1"/>
+          </a:fillRef>
+          <a:effectRef idx="2">
+            <a:schemeClr val="accent1"/>
+          </a:effectRef>
+          <a:fontRef idx="minor">
+            <a:schemeClr val="lt1"/>
+          </a:fontRef>
+        </p:style>
+        <p:txBody>
+          <a:bodyPr rtlCol="0" anchor="ctr"/>
+          <a:lstStyle/>
+          <a:p>
+            <a:pPr algn="ctr"/>
+          </a:p>
+        </p:txBody>
+      </p:sp>
+      <p:sp>
+        <p:nvSpPr>
+          <p:cNvPr id="3" name="TextBox 2"/>
           <p:cNvSpPr txBox="1"/>
           <p:nvPr/>
         </p:nvSpPr>
         <p:spPr>
           <a:xfrm>
-            <a:off x="457200" y="2286000"/>
-            <a:ext cx="8229600" cy="1371600"/>
+            <a:off x="822960" y="2240280"/>
+            <a:ext cx="10545775" cy="1463040"/>
           </a:xfrm>
           <a:prstGeom prst="rect">
             <a:avLst/>
@@ -3117,20 +3153,26 @@
           <a:noFill/>
         </p:spPr>
         <p:txBody>
-          <a:bodyPr wrap="square">
+          <a:bodyPr wrap="square" anchor="t" lIns="0" rIns="0" tIns="0" bIns="0">
             <a:spAutoFit/>
           </a:bodyPr>
           <a:lstStyle/>
           <a:p>
             <a:pPr algn="ctr">
-              <a:defRPr sz="7200" b="1">
+              <a:lnSpc>
+                <a:spcPct val="100000"/>
+              </a:lnSpc>
+              <a:spcBef>
+                <a:spcPts val="0"/>
+              </a:spcBef>
+            </a:pPr>
+            <a:r>
+              <a:rPr sz="8800" b="1">
                 <a:solidFill>
-                  <a:srgbClr val="009688"/>
+                  <a:srgbClr val="1A1A1F"/>
                 </a:solidFill>
-                <a:latin typeface="Calibri"/>
-              </a:defRPr>
-            </a:pPr>
-            <a:r>
+                <a:latin typeface="Arial"/>
+              </a:rPr>
               <a:t>Marrow</a:t>
             </a:r>
           </a:p>
@@ -3138,14 +3180,58 @@
       </p:sp>
       <p:sp>
         <p:nvSpPr>
-          <p:cNvPr id="3" name="TextBox 2"/>
+          <p:cNvPr id="4" name="Rectangle 3"/>
+          <p:cNvSpPr/>
+          <p:nvPr/>
+        </p:nvSpPr>
+        <p:spPr>
+          <a:xfrm>
+            <a:off x="5455767" y="3767328"/>
+            <a:ext cx="1280160" cy="44450"/>
+          </a:xfrm>
+          <a:prstGeom prst="rect">
+            <a:avLst/>
+          </a:prstGeom>
+          <a:solidFill>
+            <a:srgbClr val="C2410C"/>
+          </a:solidFill>
+          <a:ln>
+            <a:noFill/>
+          </a:ln>
+          <a:effectLst/>
+        </p:spPr>
+        <p:style>
+          <a:lnRef idx="1">
+            <a:schemeClr val="accent1"/>
+          </a:lnRef>
+          <a:fillRef idx="3">
+            <a:schemeClr val="accent1"/>
+          </a:fillRef>
+          <a:effectRef idx="2">
+            <a:schemeClr val="accent1"/>
+          </a:effectRef>
+          <a:fontRef idx="minor">
+            <a:schemeClr val="lt1"/>
+          </a:fontRef>
+        </p:style>
+        <p:txBody>
+          <a:bodyPr rtlCol="0" anchor="ctr"/>
+          <a:lstStyle/>
+          <a:p>
+            <a:pPr algn="ctr"/>
+          </a:p>
+        </p:txBody>
+      </p:sp>
+      <p:sp>
+        <p:nvSpPr>
+          <p:cNvPr id="5" name="TextBox 4"/>
           <p:cNvSpPr txBox="1"/>
           <p:nvPr/>
         </p:nvSpPr>
         <p:spPr>
           <a:xfrm>
-            <a:off x="457200" y="3840480"/>
-            <a:ext cx="8229600" cy="914400"/>
+            <a:off x="822960" y="4206240"/>
+            <a:ext cx="10545775" cy="822960"/>
           </a:xfrm>
           <a:prstGeom prst="rect">
             <a:avLst/>
@@ -3153,21 +3239,69 @@
           <a:noFill/>
         </p:spPr>
         <p:txBody>
-          <a:bodyPr wrap="square">
+          <a:bodyPr wrap="square" anchor="t" lIns="0" rIns="0" tIns="0" bIns="0">
             <a:spAutoFit/>
           </a:bodyPr>
           <a:lstStyle/>
           <a:p>
             <a:pPr algn="ctr">
-              <a:defRPr sz="3200">
+              <a:lnSpc>
+                <a:spcPct val="120000"/>
+              </a:lnSpc>
+              <a:spcBef>
+                <a:spcPts val="0"/>
+              </a:spcBef>
+            </a:pPr>
+            <a:r>
+              <a:rPr sz="2600" b="0">
                 <a:solidFill>
-                  <a:srgbClr val="1E1E1E"/>
+                  <a:srgbClr val="4A4A55"/>
                 </a:solidFill>
-                <a:latin typeface="Calibri"/>
-              </a:defRPr>
+                <a:latin typeface="Arial"/>
+              </a:rPr>
+              <a:t>Know what your tests actually cover.</a:t>
+            </a:r>
+          </a:p>
+        </p:txBody>
+      </p:sp>
+      <p:sp>
+        <p:nvSpPr>
+          <p:cNvPr id="6" name="TextBox 5"/>
+          <p:cNvSpPr txBox="1"/>
+          <p:nvPr/>
+        </p:nvSpPr>
+        <p:spPr>
+          <a:xfrm>
+            <a:off x="822960" y="5806440"/>
+            <a:ext cx="10545775" cy="320040"/>
+          </a:xfrm>
+          <a:prstGeom prst="rect">
+            <a:avLst/>
+          </a:prstGeom>
+          <a:noFill/>
+        </p:spPr>
+        <p:txBody>
+          <a:bodyPr wrap="square" anchor="t" lIns="0" rIns="0" tIns="0" bIns="0">
+            <a:spAutoFit/>
+          </a:bodyPr>
+          <a:lstStyle/>
+          <a:p>
+            <a:pPr algn="ctr">
+              <a:lnSpc>
+                <a:spcPct val="100000"/>
+              </a:lnSpc>
+              <a:spcBef>
+                <a:spcPts val="0"/>
+              </a:spcBef>
             </a:pPr>
             <a:r>
-              <a:t>Know what your tests actually cover.</a:t>
+              <a:rPr sz="1300" b="0">
+                <a:solidFill>
+                  <a:srgbClr val="9A9AA4"/>
+                </a:solidFill>
+                <a:latin typeface="Arial"/>
+              </a:rPr>
+              <a:t>A CLI that maps a repo's tests to the code they cover</a:t>
             </a:r>
           </a:p>
         </p:txBody>
@@ -3183,14 +3317,6 @@
 <file path=ppt/slides/slide2.xml><?xml version="1.0" encoding="utf-8"?>
 <p:sld xmlns:a="http://schemas.openxmlformats.org/drawingml/2006/main" xmlns:p="http://schemas.openxmlformats.org/presentationml/2006/main" xmlns:r="http://schemas.openxmlformats.org/officeDocument/2006/relationships">
   <p:cSld>
-    <p:bg>
-      <p:bgPr>
-        <a:solidFill>
-          <a:srgbClr val="FFFFFF"/>
-        </a:solidFill>
-        <a:effectLst/>
-      </p:bgPr>
-    </p:bg>
     <p:spTree>
       <p:nvGrpSpPr>
         <p:cNvPr id="1" name=""/>
@@ -3200,14 +3326,58 @@
       <p:grpSpPr/>
       <p:sp>
         <p:nvSpPr>
-          <p:cNvPr id="2" name="TextBox 1"/>
+          <p:cNvPr id="2" name="Rectangle 1"/>
+          <p:cNvSpPr/>
+          <p:nvPr/>
+        </p:nvSpPr>
+        <p:spPr>
+          <a:xfrm>
+            <a:off x="0" y="0"/>
+            <a:ext cx="12191695" cy="6858000"/>
+          </a:xfrm>
+          <a:prstGeom prst="rect">
+            <a:avLst/>
+          </a:prstGeom>
+          <a:solidFill>
+            <a:srgbClr val="F7F6F3"/>
+          </a:solidFill>
+          <a:ln>
+            <a:noFill/>
+          </a:ln>
+          <a:effectLst/>
+        </p:spPr>
+        <p:style>
+          <a:lnRef idx="1">
+            <a:schemeClr val="accent1"/>
+          </a:lnRef>
+          <a:fillRef idx="3">
+            <a:schemeClr val="accent1"/>
+          </a:fillRef>
+          <a:effectRef idx="2">
+            <a:schemeClr val="accent1"/>
+          </a:effectRef>
+          <a:fontRef idx="minor">
+            <a:schemeClr val="lt1"/>
+          </a:fontRef>
+        </p:style>
+        <p:txBody>
+          <a:bodyPr rtlCol="0" anchor="ctr"/>
+          <a:lstStyle/>
+          <a:p>
+            <a:pPr algn="ctr"/>
+          </a:p>
+        </p:txBody>
+      </p:sp>
+      <p:sp>
+        <p:nvSpPr>
+          <p:cNvPr id="3" name="TextBox 2"/>
           <p:cNvSpPr txBox="1"/>
           <p:nvPr/>
         </p:nvSpPr>
         <p:spPr>
           <a:xfrm>
-            <a:off x="685800" y="457200"/>
-            <a:ext cx="7772400" cy="914400"/>
+            <a:off x="822960" y="566928"/>
+            <a:ext cx="10545775" cy="274320"/>
           </a:xfrm>
           <a:prstGeom prst="rect">
             <a:avLst/>
@@ -3215,35 +3385,41 @@
           <a:noFill/>
         </p:spPr>
         <p:txBody>
-          <a:bodyPr wrap="square">
+          <a:bodyPr wrap="square" anchor="t" lIns="0" rIns="0" tIns="0" bIns="0">
             <a:spAutoFit/>
           </a:bodyPr>
           <a:lstStyle/>
           <a:p>
-            <a:pPr>
-              <a:defRPr sz="5400" b="1">
+            <a:pPr algn="ctr">
+              <a:lnSpc>
+                <a:spcPct val="100000"/>
+              </a:lnSpc>
+              <a:spcBef>
+                <a:spcPts val="0"/>
+              </a:spcBef>
+            </a:pPr>
+            <a:r>
+              <a:rPr sz="1300" b="1">
                 <a:solidFill>
-                  <a:srgbClr val="009688"/>
+                  <a:srgbClr val="C2410C"/>
                 </a:solidFill>
-                <a:latin typeface="Calibri"/>
-              </a:defRPr>
-            </a:pPr>
-            <a:r>
-              <a:t>Big test suites hide their gaps.</a:t>
-            </a:r>
-          </a:p>
-        </p:txBody>
-      </p:sp>
-      <p:sp>
-        <p:nvSpPr>
-          <p:cNvPr id="3" name="TextBox 2"/>
+                <a:latin typeface="Arial"/>
+              </a:rPr>
+              <a:t>THE PROBLEM</a:t>
+            </a:r>
+          </a:p>
+        </p:txBody>
+      </p:sp>
+      <p:sp>
+        <p:nvSpPr>
+          <p:cNvPr id="4" name="TextBox 3"/>
           <p:cNvSpPr txBox="1"/>
           <p:nvPr/>
         </p:nvSpPr>
         <p:spPr>
           <a:xfrm>
-            <a:off x="1371600" y="1645920"/>
-            <a:ext cx="7315200" cy="4572000"/>
+            <a:off x="822960" y="1024128"/>
+            <a:ext cx="10545775" cy="1371600"/>
           </a:xfrm>
           <a:prstGeom prst="rect">
             <a:avLst/>
@@ -3251,65 +3427,174 @@
           <a:noFill/>
         </p:spPr>
         <p:txBody>
-          <a:bodyPr wrap="square">
+          <a:bodyPr wrap="square" anchor="t" lIns="0" rIns="0" tIns="0" bIns="0">
             <a:spAutoFit/>
           </a:bodyPr>
           <a:lstStyle/>
           <a:p>
-            <a:pPr>
+            <a:pPr algn="ctr">
+              <a:lnSpc>
+                <a:spcPct val="110000"/>
+              </a:lnSpc>
               <a:spcBef>
-                <a:spcPts val="1200"/>
+                <a:spcPts val="0"/>
               </a:spcBef>
-              <a:spcAft>
-                <a:spcPts val="1200"/>
-              </a:spcAft>
-              <a:defRPr sz="2800">
+            </a:pPr>
+            <a:r>
+              <a:rPr sz="4000" b="1">
                 <a:solidFill>
-                  <a:srgbClr val="1E1E1E"/>
+                  <a:srgbClr val="1A1A1F"/>
                 </a:solidFill>
-                <a:latin typeface="Calibri"/>
-              </a:defRPr>
+                <a:latin typeface="Arial"/>
+              </a:rPr>
+              <a:t>Big test suites hide their gaps.</a:t>
+            </a:r>
+          </a:p>
+        </p:txBody>
+      </p:sp>
+      <p:sp>
+        <p:nvSpPr>
+          <p:cNvPr id="5" name="Rectangle 4"/>
+          <p:cNvSpPr/>
+          <p:nvPr/>
+        </p:nvSpPr>
+        <p:spPr>
+          <a:xfrm>
+            <a:off x="5592927" y="2148840"/>
+            <a:ext cx="1005840" cy="44450"/>
+          </a:xfrm>
+          <a:prstGeom prst="rect">
+            <a:avLst/>
+          </a:prstGeom>
+          <a:solidFill>
+            <a:srgbClr val="C2410C"/>
+          </a:solidFill>
+          <a:ln>
+            <a:noFill/>
+          </a:ln>
+          <a:effectLst/>
+        </p:spPr>
+        <p:style>
+          <a:lnRef idx="1">
+            <a:schemeClr val="accent1"/>
+          </a:lnRef>
+          <a:fillRef idx="3">
+            <a:schemeClr val="accent1"/>
+          </a:fillRef>
+          <a:effectRef idx="2">
+            <a:schemeClr val="accent1"/>
+          </a:effectRef>
+          <a:fontRef idx="minor">
+            <a:schemeClr val="lt1"/>
+          </a:fontRef>
+        </p:style>
+        <p:txBody>
+          <a:bodyPr rtlCol="0" anchor="ctr"/>
+          <a:lstStyle/>
+          <a:p>
+            <a:pPr algn="ctr"/>
+          </a:p>
+        </p:txBody>
+      </p:sp>
+      <p:sp>
+        <p:nvSpPr>
+          <p:cNvPr id="6" name="TextBox 5"/>
+          <p:cNvSpPr txBox="1"/>
+          <p:nvPr/>
+        </p:nvSpPr>
+        <p:spPr>
+          <a:xfrm>
+            <a:off x="1965960" y="2788920"/>
+            <a:ext cx="8259775" cy="2011680"/>
+          </a:xfrm>
+          <a:prstGeom prst="rect">
+            <a:avLst/>
+          </a:prstGeom>
+          <a:noFill/>
+        </p:spPr>
+        <p:txBody>
+          <a:bodyPr wrap="square" anchor="t" lIns="0" rIns="0" tIns="0" bIns="0">
+            <a:spAutoFit/>
+          </a:bodyPr>
+          <a:lstStyle/>
+          <a:p>
+            <a:pPr algn="ctr">
+              <a:lnSpc>
+                <a:spcPct val="135000"/>
+              </a:lnSpc>
+              <a:spcBef>
+                <a:spcPts val="0"/>
+              </a:spcBef>
             </a:pPr>
             <a:r>
-              <a:t>Large suites are slow and opaque</a:t>
-            </a:r>
-          </a:p>
-          <a:p>
-            <a:pPr>
+              <a:rPr sz="2400" b="0">
+                <a:solidFill>
+                  <a:srgbClr val="4A4A55"/>
+                </a:solidFill>
+                <a:latin typeface="Arial"/>
+              </a:rPr>
+              <a:t>Large suites are slow, and nobody knows which tests cover which code.</a:t>
+            </a:r>
+          </a:p>
+          <a:p>
+            <a:pPr algn="ctr">
+              <a:lnSpc>
+                <a:spcPct val="135000"/>
+              </a:lnSpc>
               <a:spcBef>
-                <a:spcPts val="1200"/>
+                <a:spcPts val="1800"/>
               </a:spcBef>
-              <a:spcAft>
-                <a:spcPts val="1200"/>
-              </a:spcAft>
-              <a:defRPr sz="2800">
+            </a:pPr>
+            <a:r>
+              <a:rPr sz="2400" b="0">
                 <a:solidFill>
-                  <a:srgbClr val="1E1E1E"/>
+                  <a:srgbClr val="4A4A55"/>
                 </a:solidFill>
-                <a:latin typeface="Calibri"/>
-              </a:defRPr>
+                <a:latin typeface="Arial"/>
+              </a:rPr>
+              <a:t>So dead tests linger for years — and the real gaps go unnoticed.</a:t>
+            </a:r>
+          </a:p>
+        </p:txBody>
+      </p:sp>
+      <p:sp>
+        <p:nvSpPr>
+          <p:cNvPr id="7" name="TextBox 6"/>
+          <p:cNvSpPr txBox="1"/>
+          <p:nvPr/>
+        </p:nvSpPr>
+        <p:spPr>
+          <a:xfrm>
+            <a:off x="10454335" y="6199632"/>
+            <a:ext cx="914400" cy="274320"/>
+          </a:xfrm>
+          <a:prstGeom prst="rect">
+            <a:avLst/>
+          </a:prstGeom>
+          <a:noFill/>
+        </p:spPr>
+        <p:txBody>
+          <a:bodyPr wrap="square" anchor="t" lIns="0" rIns="0" tIns="0" bIns="0">
+            <a:spAutoFit/>
+          </a:bodyPr>
+          <a:lstStyle/>
+          <a:p>
+            <a:pPr algn="r">
+              <a:lnSpc>
+                <a:spcPct val="100000"/>
+              </a:lnSpc>
+              <a:spcBef>
+                <a:spcPts val="0"/>
+              </a:spcBef>
             </a:pPr>
             <a:r>
-              <a:t>Nobody knows which tests cover which code</a:t>
-            </a:r>
-          </a:p>
-          <a:p>
-            <a:pPr>
-              <a:spcBef>
-                <a:spcPts val="1200"/>
-              </a:spcBef>
-              <a:spcAft>
-                <a:spcPts val="1200"/>
-              </a:spcAft>
-              <a:defRPr sz="2800">
+              <a:rPr sz="1100" b="0">
                 <a:solidFill>
-                  <a:srgbClr val="1E1E1E"/>
+                  <a:srgbClr val="9A9AA4"/>
                 </a:solidFill>
-                <a:latin typeface="Calibri"/>
-              </a:defRPr>
-            </a:pPr>
-            <a:r>
-              <a:t>Dead tests linger, real gaps go unnoticed</a:t>
+                <a:latin typeface="Arial"/>
+              </a:rPr>
+              <a:t>2</a:t>
             </a:r>
           </a:p>
         </p:txBody>
@@ -3325,14 +3610,6 @@
 <file path=ppt/slides/slide3.xml><?xml version="1.0" encoding="utf-8"?>
 <p:sld xmlns:a="http://schemas.openxmlformats.org/drawingml/2006/main" xmlns:p="http://schemas.openxmlformats.org/presentationml/2006/main" xmlns:r="http://schemas.openxmlformats.org/officeDocument/2006/relationships">
   <p:cSld>
-    <p:bg>
-      <p:bgPr>
-        <a:solidFill>
-          <a:srgbClr val="FFFFFF"/>
-        </a:solidFill>
-        <a:effectLst/>
-      </p:bgPr>
-    </p:bg>
     <p:spTree>
       <p:nvGrpSpPr>
         <p:cNvPr id="1" name=""/>
@@ -3342,14 +3619,58 @@
       <p:grpSpPr/>
       <p:sp>
         <p:nvSpPr>
-          <p:cNvPr id="2" name="TextBox 1"/>
+          <p:cNvPr id="2" name="Rectangle 1"/>
+          <p:cNvSpPr/>
+          <p:nvPr/>
+        </p:nvSpPr>
+        <p:spPr>
+          <a:xfrm>
+            <a:off x="0" y="0"/>
+            <a:ext cx="12191695" cy="6858000"/>
+          </a:xfrm>
+          <a:prstGeom prst="rect">
+            <a:avLst/>
+          </a:prstGeom>
+          <a:solidFill>
+            <a:srgbClr val="F7F6F3"/>
+          </a:solidFill>
+          <a:ln>
+            <a:noFill/>
+          </a:ln>
+          <a:effectLst/>
+        </p:spPr>
+        <p:style>
+          <a:lnRef idx="1">
+            <a:schemeClr val="accent1"/>
+          </a:lnRef>
+          <a:fillRef idx="3">
+            <a:schemeClr val="accent1"/>
+          </a:fillRef>
+          <a:effectRef idx="2">
+            <a:schemeClr val="accent1"/>
+          </a:effectRef>
+          <a:fontRef idx="minor">
+            <a:schemeClr val="lt1"/>
+          </a:fontRef>
+        </p:style>
+        <p:txBody>
+          <a:bodyPr rtlCol="0" anchor="ctr"/>
+          <a:lstStyle/>
+          <a:p>
+            <a:pPr algn="ctr"/>
+          </a:p>
+        </p:txBody>
+      </p:sp>
+      <p:sp>
+        <p:nvSpPr>
+          <p:cNvPr id="3" name="TextBox 2"/>
           <p:cNvSpPr txBox="1"/>
           <p:nvPr/>
         </p:nvSpPr>
         <p:spPr>
           <a:xfrm>
-            <a:off x="685800" y="457200"/>
-            <a:ext cx="7772400" cy="914400"/>
+            <a:off x="822960" y="566928"/>
+            <a:ext cx="10545775" cy="274320"/>
           </a:xfrm>
           <a:prstGeom prst="rect">
             <a:avLst/>
@@ -3357,35 +3678,41 @@
           <a:noFill/>
         </p:spPr>
         <p:txBody>
-          <a:bodyPr wrap="square">
+          <a:bodyPr wrap="square" anchor="t" lIns="0" rIns="0" tIns="0" bIns="0">
             <a:spAutoFit/>
           </a:bodyPr>
           <a:lstStyle/>
           <a:p>
-            <a:pPr>
-              <a:defRPr sz="5400" b="1">
+            <a:pPr algn="ctr">
+              <a:lnSpc>
+                <a:spcPct val="100000"/>
+              </a:lnSpc>
+              <a:spcBef>
+                <a:spcPts val="0"/>
+              </a:spcBef>
+            </a:pPr>
+            <a:r>
+              <a:rPr sz="1300" b="1">
                 <a:solidFill>
-                  <a:srgbClr val="009688"/>
+                  <a:srgbClr val="C2410C"/>
                 </a:solidFill>
-                <a:latin typeface="Calibri"/>
-              </a:defRPr>
-            </a:pPr>
-            <a:r>
-              <a:t>Watch one run. Draw the real map.</a:t>
-            </a:r>
-          </a:p>
-        </p:txBody>
-      </p:sp>
-      <p:sp>
-        <p:nvSpPr>
-          <p:cNvPr id="3" name="TextBox 2"/>
+                <a:latin typeface="Arial"/>
+              </a:rPr>
+              <a:t>THE IDEA</a:t>
+            </a:r>
+          </a:p>
+        </p:txBody>
+      </p:sp>
+      <p:sp>
+        <p:nvSpPr>
+          <p:cNvPr id="4" name="TextBox 3"/>
           <p:cNvSpPr txBox="1"/>
           <p:nvPr/>
         </p:nvSpPr>
         <p:spPr>
           <a:xfrm>
-            <a:off x="1371600" y="1645920"/>
-            <a:ext cx="7315200" cy="4572000"/>
+            <a:off x="822960" y="1024128"/>
+            <a:ext cx="10545775" cy="1371600"/>
           </a:xfrm>
           <a:prstGeom prst="rect">
             <a:avLst/>
@@ -3393,65 +3720,174 @@
           <a:noFill/>
         </p:spPr>
         <p:txBody>
-          <a:bodyPr wrap="square">
+          <a:bodyPr wrap="square" anchor="t" lIns="0" rIns="0" tIns="0" bIns="0">
             <a:spAutoFit/>
           </a:bodyPr>
           <a:lstStyle/>
           <a:p>
-            <a:pPr>
+            <a:pPr algn="ctr">
+              <a:lnSpc>
+                <a:spcPct val="110000"/>
+              </a:lnSpc>
               <a:spcBef>
-                <a:spcPts val="1200"/>
+                <a:spcPts val="0"/>
               </a:spcBef>
-              <a:spcAft>
-                <a:spcPts val="1200"/>
-              </a:spcAft>
-              <a:defRPr sz="2800">
+            </a:pPr>
+            <a:r>
+              <a:rPr sz="4000" b="1">
                 <a:solidFill>
-                  <a:srgbClr val="1E1E1E"/>
+                  <a:srgbClr val="1A1A1F"/>
                 </a:solidFill>
-                <a:latin typeface="Calibri"/>
-              </a:defRPr>
+                <a:latin typeface="Arial"/>
+              </a:rPr>
+              <a:t>Watch one run. Draw the real map.</a:t>
+            </a:r>
+          </a:p>
+        </p:txBody>
+      </p:sp>
+      <p:sp>
+        <p:nvSpPr>
+          <p:cNvPr id="5" name="Rectangle 4"/>
+          <p:cNvSpPr/>
+          <p:nvPr/>
+        </p:nvSpPr>
+        <p:spPr>
+          <a:xfrm>
+            <a:off x="5592927" y="2148840"/>
+            <a:ext cx="1005840" cy="44450"/>
+          </a:xfrm>
+          <a:prstGeom prst="rect">
+            <a:avLst/>
+          </a:prstGeom>
+          <a:solidFill>
+            <a:srgbClr val="C2410C"/>
+          </a:solidFill>
+          <a:ln>
+            <a:noFill/>
+          </a:ln>
+          <a:effectLst/>
+        </p:spPr>
+        <p:style>
+          <a:lnRef idx="1">
+            <a:schemeClr val="accent1"/>
+          </a:lnRef>
+          <a:fillRef idx="3">
+            <a:schemeClr val="accent1"/>
+          </a:fillRef>
+          <a:effectRef idx="2">
+            <a:schemeClr val="accent1"/>
+          </a:effectRef>
+          <a:fontRef idx="minor">
+            <a:schemeClr val="lt1"/>
+          </a:fontRef>
+        </p:style>
+        <p:txBody>
+          <a:bodyPr rtlCol="0" anchor="ctr"/>
+          <a:lstStyle/>
+          <a:p>
+            <a:pPr algn="ctr"/>
+          </a:p>
+        </p:txBody>
+      </p:sp>
+      <p:sp>
+        <p:nvSpPr>
+          <p:cNvPr id="6" name="TextBox 5"/>
+          <p:cNvSpPr txBox="1"/>
+          <p:nvPr/>
+        </p:nvSpPr>
+        <p:spPr>
+          <a:xfrm>
+            <a:off x="1965960" y="2788920"/>
+            <a:ext cx="8259775" cy="2011680"/>
+          </a:xfrm>
+          <a:prstGeom prst="rect">
+            <a:avLst/>
+          </a:prstGeom>
+          <a:noFill/>
+        </p:spPr>
+        <p:txBody>
+          <a:bodyPr wrap="square" anchor="t" lIns="0" rIns="0" tIns="0" bIns="0">
+            <a:spAutoFit/>
+          </a:bodyPr>
+          <a:lstStyle/>
+          <a:p>
+            <a:pPr algn="ctr">
+              <a:lnSpc>
+                <a:spcPct val="135000"/>
+              </a:lnSpc>
+              <a:spcBef>
+                <a:spcPts val="0"/>
+              </a:spcBef>
             </a:pPr>
             <a:r>
-              <a:t>Instruments a single test run</a:t>
-            </a:r>
-          </a:p>
-          <a:p>
-            <a:pPr>
+              <a:rPr sz="2400" b="0">
+                <a:solidFill>
+                  <a:srgbClr val="4A4A55"/>
+                </a:solidFill>
+                <a:latin typeface="Arial"/>
+              </a:rPr>
+              <a:t>Marrow instruments a single test run and produces a test → code coverage map.</a:t>
+            </a:r>
+          </a:p>
+          <a:p>
+            <a:pPr algn="ctr">
+              <a:lnSpc>
+                <a:spcPct val="135000"/>
+              </a:lnSpc>
               <a:spcBef>
-                <a:spcPts val="1200"/>
+                <a:spcPts val="1800"/>
               </a:spcBef>
-              <a:spcAft>
-                <a:spcPts val="1200"/>
-              </a:spcAft>
-              <a:defRPr sz="2800">
+            </a:pPr>
+            <a:r>
+              <a:rPr sz="2400" b="1">
                 <a:solidFill>
-                  <a:srgbClr val="1E1E1E"/>
+                  <a:srgbClr val="C2410C"/>
                 </a:solidFill>
-                <a:latin typeface="Calibri"/>
-              </a:defRPr>
+                <a:latin typeface="Arial"/>
+              </a:rPr>
+              <a:t>No annotations. No config.</a:t>
+            </a:r>
+          </a:p>
+        </p:txBody>
+      </p:sp>
+      <p:sp>
+        <p:nvSpPr>
+          <p:cNvPr id="7" name="TextBox 6"/>
+          <p:cNvSpPr txBox="1"/>
+          <p:nvPr/>
+        </p:nvSpPr>
+        <p:spPr>
+          <a:xfrm>
+            <a:off x="10454335" y="6199632"/>
+            <a:ext cx="914400" cy="274320"/>
+          </a:xfrm>
+          <a:prstGeom prst="rect">
+            <a:avLst/>
+          </a:prstGeom>
+          <a:noFill/>
+        </p:spPr>
+        <p:txBody>
+          <a:bodyPr wrap="square" anchor="t" lIns="0" rIns="0" tIns="0" bIns="0">
+            <a:spAutoFit/>
+          </a:bodyPr>
+          <a:lstStyle/>
+          <a:p>
+            <a:pPr algn="r">
+              <a:lnSpc>
+                <a:spcPct val="100000"/>
+              </a:lnSpc>
+              <a:spcBef>
+                <a:spcPts val="0"/>
+              </a:spcBef>
             </a:pPr>
             <a:r>
-              <a:t>Produces a test→code coverage map</a:t>
-            </a:r>
-          </a:p>
-          <a:p>
-            <a:pPr>
-              <a:spcBef>
-                <a:spcPts val="1200"/>
-              </a:spcBef>
-              <a:spcAft>
-                <a:spcPts val="1200"/>
-              </a:spcAft>
-              <a:defRPr sz="2800">
+              <a:rPr sz="1100" b="0">
                 <a:solidFill>
-                  <a:srgbClr val="1E1E1E"/>
+                  <a:srgbClr val="9A9AA4"/>
                 </a:solidFill>
-                <a:latin typeface="Calibri"/>
-              </a:defRPr>
-            </a:pPr>
-            <a:r>
-              <a:t>No annotations, no config</a:t>
+                <a:latin typeface="Arial"/>
+              </a:rPr>
+              <a:t>3</a:t>
             </a:r>
           </a:p>
         </p:txBody>
@@ -3467,14 +3903,6 @@
 <file path=ppt/slides/slide4.xml><?xml version="1.0" encoding="utf-8"?>
 <p:sld xmlns:a="http://schemas.openxmlformats.org/drawingml/2006/main" xmlns:p="http://schemas.openxmlformats.org/presentationml/2006/main" xmlns:r="http://schemas.openxmlformats.org/officeDocument/2006/relationships">
   <p:cSld>
-    <p:bg>
-      <p:bgPr>
-        <a:solidFill>
-          <a:srgbClr val="FFFFFF"/>
-        </a:solidFill>
-        <a:effectLst/>
-      </p:bgPr>
-    </p:bg>
     <p:spTree>
       <p:nvGrpSpPr>
         <p:cNvPr id="1" name=""/>
@@ -3484,14 +3912,58 @@
       <p:grpSpPr/>
       <p:sp>
         <p:nvSpPr>
-          <p:cNvPr id="2" name="TextBox 1"/>
+          <p:cNvPr id="2" name="Rectangle 1"/>
+          <p:cNvSpPr/>
+          <p:nvPr/>
+        </p:nvSpPr>
+        <p:spPr>
+          <a:xfrm>
+            <a:off x="0" y="0"/>
+            <a:ext cx="12191695" cy="6858000"/>
+          </a:xfrm>
+          <a:prstGeom prst="rect">
+            <a:avLst/>
+          </a:prstGeom>
+          <a:solidFill>
+            <a:srgbClr val="F7F6F3"/>
+          </a:solidFill>
+          <a:ln>
+            <a:noFill/>
+          </a:ln>
+          <a:effectLst/>
+        </p:spPr>
+        <p:style>
+          <a:lnRef idx="1">
+            <a:schemeClr val="accent1"/>
+          </a:lnRef>
+          <a:fillRef idx="3">
+            <a:schemeClr val="accent1"/>
+          </a:fillRef>
+          <a:effectRef idx="2">
+            <a:schemeClr val="accent1"/>
+          </a:effectRef>
+          <a:fontRef idx="minor">
+            <a:schemeClr val="lt1"/>
+          </a:fontRef>
+        </p:style>
+        <p:txBody>
+          <a:bodyPr rtlCol="0" anchor="ctr"/>
+          <a:lstStyle/>
+          <a:p>
+            <a:pPr algn="ctr"/>
+          </a:p>
+        </p:txBody>
+      </p:sp>
+      <p:sp>
+        <p:nvSpPr>
+          <p:cNvPr id="3" name="TextBox 2"/>
           <p:cNvSpPr txBox="1"/>
           <p:nvPr/>
         </p:nvSpPr>
         <p:spPr>
           <a:xfrm>
-            <a:off x="685800" y="457200"/>
-            <a:ext cx="7772400" cy="914400"/>
+            <a:off x="822960" y="566928"/>
+            <a:ext cx="10545775" cy="274320"/>
           </a:xfrm>
           <a:prstGeom prst="rect">
             <a:avLst/>
@@ -3499,35 +3971,41 @@
           <a:noFill/>
         </p:spPr>
         <p:txBody>
-          <a:bodyPr wrap="square">
+          <a:bodyPr wrap="square" anchor="t" lIns="0" rIns="0" tIns="0" bIns="0">
             <a:spAutoFit/>
           </a:bodyPr>
           <a:lstStyle/>
           <a:p>
-            <a:pPr>
-              <a:defRPr sz="5400" b="1">
+            <a:pPr algn="ctr">
+              <a:lnSpc>
+                <a:spcPct val="100000"/>
+              </a:lnSpc>
+              <a:spcBef>
+                <a:spcPts val="0"/>
+              </a:spcBef>
+            </a:pPr>
+            <a:r>
+              <a:rPr sz="1300" b="1">
                 <a:solidFill>
-                  <a:srgbClr val="009688"/>
+                  <a:srgbClr val="C2410C"/>
                 </a:solidFill>
-                <a:latin typeface="Calibri"/>
-              </a:defRPr>
-            </a:pPr>
-            <a:r>
-              <a:t>How it works</a:t>
-            </a:r>
-          </a:p>
-        </p:txBody>
-      </p:sp>
-      <p:sp>
-        <p:nvSpPr>
-          <p:cNvPr id="3" name="TextBox 2"/>
+                <a:latin typeface="Arial"/>
+              </a:rPr>
+              <a:t>HOW IT WORKS</a:t>
+            </a:r>
+          </a:p>
+        </p:txBody>
+      </p:sp>
+      <p:sp>
+        <p:nvSpPr>
+          <p:cNvPr id="4" name="TextBox 3"/>
           <p:cNvSpPr txBox="1"/>
           <p:nvPr/>
         </p:nvSpPr>
         <p:spPr>
           <a:xfrm>
-            <a:off x="1371600" y="1645920"/>
-            <a:ext cx="7315200" cy="4572000"/>
+            <a:off x="822960" y="1024128"/>
+            <a:ext cx="10545775" cy="1371600"/>
           </a:xfrm>
           <a:prstGeom prst="rect">
             <a:avLst/>
@@ -3535,65 +4013,497 @@
           <a:noFill/>
         </p:spPr>
         <p:txBody>
-          <a:bodyPr wrap="square">
+          <a:bodyPr wrap="square" anchor="t" lIns="0" rIns="0" tIns="0" bIns="0">
             <a:spAutoFit/>
           </a:bodyPr>
           <a:lstStyle/>
           <a:p>
-            <a:pPr>
+            <a:pPr algn="ctr">
+              <a:lnSpc>
+                <a:spcPct val="110000"/>
+              </a:lnSpc>
               <a:spcBef>
-                <a:spcPts val="1200"/>
+                <a:spcPts val="0"/>
               </a:spcBef>
-              <a:spcAft>
-                <a:spcPts val="1200"/>
-              </a:spcAft>
-              <a:defRPr sz="2800">
+            </a:pPr>
+            <a:r>
+              <a:rPr sz="4000" b="1">
                 <a:solidFill>
-                  <a:srgbClr val="1E1E1E"/>
+                  <a:srgbClr val="1A1A1F"/>
                 </a:solidFill>
-                <a:latin typeface="Calibri"/>
-              </a:defRPr>
+                <a:latin typeface="Arial"/>
+              </a:rPr>
+              <a:t>Three steps, one command.</a:t>
+            </a:r>
+          </a:p>
+        </p:txBody>
+      </p:sp>
+      <p:sp>
+        <p:nvSpPr>
+          <p:cNvPr id="5" name="Rectangle 4"/>
+          <p:cNvSpPr/>
+          <p:nvPr/>
+        </p:nvSpPr>
+        <p:spPr>
+          <a:xfrm>
+            <a:off x="5592927" y="2148840"/>
+            <a:ext cx="1005840" cy="44450"/>
+          </a:xfrm>
+          <a:prstGeom prst="rect">
+            <a:avLst/>
+          </a:prstGeom>
+          <a:solidFill>
+            <a:srgbClr val="C2410C"/>
+          </a:solidFill>
+          <a:ln>
+            <a:noFill/>
+          </a:ln>
+          <a:effectLst/>
+        </p:spPr>
+        <p:style>
+          <a:lnRef idx="1">
+            <a:schemeClr val="accent1"/>
+          </a:lnRef>
+          <a:fillRef idx="3">
+            <a:schemeClr val="accent1"/>
+          </a:fillRef>
+          <a:effectRef idx="2">
+            <a:schemeClr val="accent1"/>
+          </a:effectRef>
+          <a:fontRef idx="minor">
+            <a:schemeClr val="lt1"/>
+          </a:fontRef>
+        </p:style>
+        <p:txBody>
+          <a:bodyPr rtlCol="0" anchor="ctr"/>
+          <a:lstStyle/>
+          <a:p>
+            <a:pPr algn="ctr"/>
+          </a:p>
+        </p:txBody>
+      </p:sp>
+      <p:sp>
+        <p:nvSpPr>
+          <p:cNvPr id="6" name="Rounded Rectangle 5"/>
+          <p:cNvSpPr/>
+          <p:nvPr/>
+        </p:nvSpPr>
+        <p:spPr>
+          <a:xfrm>
+            <a:off x="822960" y="2743200"/>
+            <a:ext cx="3271418" cy="2788920"/>
+          </a:xfrm>
+          <a:prstGeom prst="roundRect">
+            <a:avLst>
+              <a:gd name="adj" fmla="val 5500"/>
+            </a:avLst>
+          </a:prstGeom>
+          <a:solidFill>
+            <a:srgbClr val="FFFFFF"/>
+          </a:solidFill>
+          <a:ln w="12700">
+            <a:solidFill>
+              <a:srgbClr val="E3E0D9"/>
+            </a:solidFill>
+          </a:ln>
+          <a:effectLst/>
+        </p:spPr>
+        <p:style>
+          <a:lnRef idx="1">
+            <a:schemeClr val="accent1"/>
+          </a:lnRef>
+          <a:fillRef idx="3">
+            <a:schemeClr val="accent1"/>
+          </a:fillRef>
+          <a:effectRef idx="2">
+            <a:schemeClr val="accent1"/>
+          </a:effectRef>
+          <a:fontRef idx="minor">
+            <a:schemeClr val="lt1"/>
+          </a:fontRef>
+        </p:style>
+        <p:txBody>
+          <a:bodyPr rtlCol="0" anchor="ctr"/>
+          <a:lstStyle/>
+          <a:p>
+            <a:pPr algn="ctr"/>
+          </a:p>
+        </p:txBody>
+      </p:sp>
+      <p:sp>
+        <p:nvSpPr>
+          <p:cNvPr id="7" name="TextBox 6"/>
+          <p:cNvSpPr txBox="1"/>
+          <p:nvPr/>
+        </p:nvSpPr>
+        <p:spPr>
+          <a:xfrm>
+            <a:off x="1152144" y="3108960"/>
+            <a:ext cx="2613050" cy="2103120"/>
+          </a:xfrm>
+          <a:prstGeom prst="rect">
+            <a:avLst/>
+          </a:prstGeom>
+          <a:noFill/>
+        </p:spPr>
+        <p:txBody>
+          <a:bodyPr wrap="square" anchor="t" lIns="0" rIns="0" tIns="0" bIns="0">
+            <a:spAutoFit/>
+          </a:bodyPr>
+          <a:lstStyle/>
+          <a:p>
+            <a:pPr algn="l">
+              <a:lnSpc>
+                <a:spcPct val="100000"/>
+              </a:lnSpc>
+              <a:spcBef>
+                <a:spcPts val="0"/>
+              </a:spcBef>
             </a:pPr>
             <a:r>
-              <a:t>Run: marrow watch -- &lt;your test cmd&gt;</a:t>
-            </a:r>
-          </a:p>
-          <a:p>
-            <a:pPr>
+              <a:rPr sz="3000" b="1">
+                <a:solidFill>
+                  <a:srgbClr val="C2410C"/>
+                </a:solidFill>
+                <a:latin typeface="Arial"/>
+              </a:rPr>
+              <a:t>01</a:t>
+            </a:r>
+          </a:p>
+          <a:p>
+            <a:pPr algn="l">
+              <a:lnSpc>
+                <a:spcPct val="120000"/>
+              </a:lnSpc>
               <a:spcBef>
-                <a:spcPts val="1200"/>
+                <a:spcPts val="1000"/>
               </a:spcBef>
-              <a:spcAft>
-                <a:spcPts val="1200"/>
-              </a:spcAft>
-              <a:defRPr sz="2800">
+            </a:pPr>
+            <a:r>
+              <a:rPr sz="1900" b="1">
                 <a:solidFill>
-                  <a:srgbClr val="1E1E1E"/>
+                  <a:srgbClr val="1A1A1F"/>
                 </a:solidFill>
-                <a:latin typeface="Calibri"/>
-              </a:defRPr>
+                <a:latin typeface="Arial"/>
+              </a:rPr>
+              <a:t>Run your suite through Marrow.</a:t>
+            </a:r>
+          </a:p>
+          <a:p>
+            <a:pPr algn="l">
+              <a:lnSpc>
+                <a:spcPct val="130000"/>
+              </a:lnSpc>
+              <a:spcBef>
+                <a:spcPts val="1000"/>
+              </a:spcBef>
             </a:pPr>
             <a:r>
-              <a:t>Records which lines each test exercised</a:t>
-            </a:r>
-          </a:p>
-          <a:p>
-            <a:pPr>
+              <a:rPr sz="1300" b="0">
+                <a:solidFill>
+                  <a:srgbClr val="C2410C"/>
+                </a:solidFill>
+                <a:latin typeface="Consolas"/>
+              </a:rPr>
+              <a:t>marrow watch -- &lt;your test cmd&gt;</a:t>
+            </a:r>
+          </a:p>
+        </p:txBody>
+      </p:sp>
+      <p:sp>
+        <p:nvSpPr>
+          <p:cNvPr id="8" name="Rounded Rectangle 7"/>
+          <p:cNvSpPr/>
+          <p:nvPr/>
+        </p:nvSpPr>
+        <p:spPr>
+          <a:xfrm>
+            <a:off x="4460138" y="2743200"/>
+            <a:ext cx="3271418" cy="2788920"/>
+          </a:xfrm>
+          <a:prstGeom prst="roundRect">
+            <a:avLst>
+              <a:gd name="adj" fmla="val 5500"/>
+            </a:avLst>
+          </a:prstGeom>
+          <a:solidFill>
+            <a:srgbClr val="FFFFFF"/>
+          </a:solidFill>
+          <a:ln w="12700">
+            <a:solidFill>
+              <a:srgbClr val="E3E0D9"/>
+            </a:solidFill>
+          </a:ln>
+          <a:effectLst/>
+        </p:spPr>
+        <p:style>
+          <a:lnRef idx="1">
+            <a:schemeClr val="accent1"/>
+          </a:lnRef>
+          <a:fillRef idx="3">
+            <a:schemeClr val="accent1"/>
+          </a:fillRef>
+          <a:effectRef idx="2">
+            <a:schemeClr val="accent1"/>
+          </a:effectRef>
+          <a:fontRef idx="minor">
+            <a:schemeClr val="lt1"/>
+          </a:fontRef>
+        </p:style>
+        <p:txBody>
+          <a:bodyPr rtlCol="0" anchor="ctr"/>
+          <a:lstStyle/>
+          <a:p>
+            <a:pPr algn="ctr"/>
+          </a:p>
+        </p:txBody>
+      </p:sp>
+      <p:sp>
+        <p:nvSpPr>
+          <p:cNvPr id="9" name="TextBox 8"/>
+          <p:cNvSpPr txBox="1"/>
+          <p:nvPr/>
+        </p:nvSpPr>
+        <p:spPr>
+          <a:xfrm>
+            <a:off x="4789322" y="3108960"/>
+            <a:ext cx="2613050" cy="2103120"/>
+          </a:xfrm>
+          <a:prstGeom prst="rect">
+            <a:avLst/>
+          </a:prstGeom>
+          <a:noFill/>
+        </p:spPr>
+        <p:txBody>
+          <a:bodyPr wrap="square" anchor="t" lIns="0" rIns="0" tIns="0" bIns="0">
+            <a:spAutoFit/>
+          </a:bodyPr>
+          <a:lstStyle/>
+          <a:p>
+            <a:pPr algn="l">
+              <a:lnSpc>
+                <a:spcPct val="100000"/>
+              </a:lnSpc>
               <a:spcBef>
-                <a:spcPts val="1200"/>
+                <a:spcPts val="0"/>
               </a:spcBef>
-              <a:spcAft>
-                <a:spcPts val="1200"/>
-              </a:spcAft>
-              <a:defRPr sz="2800">
+            </a:pPr>
+            <a:r>
+              <a:rPr sz="3000" b="1">
                 <a:solidFill>
-                  <a:srgbClr val="1E1E1E"/>
+                  <a:srgbClr val="C2410C"/>
                 </a:solidFill>
-                <a:latin typeface="Calibri"/>
-              </a:defRPr>
+                <a:latin typeface="Arial"/>
+              </a:rPr>
+              <a:t>02</a:t>
+            </a:r>
+          </a:p>
+          <a:p>
+            <a:pPr algn="l">
+              <a:lnSpc>
+                <a:spcPct val="120000"/>
+              </a:lnSpc>
+              <a:spcBef>
+                <a:spcPts val="1000"/>
+              </a:spcBef>
             </a:pPr>
             <a:r>
-              <a:t>Emits interactive map + dead tests + untested lines</a:t>
+              <a:rPr sz="1900" b="1">
+                <a:solidFill>
+                  <a:srgbClr val="1A1A1F"/>
+                </a:solidFill>
+                <a:latin typeface="Arial"/>
+              </a:rPr>
+              <a:t>Marrow records the work.</a:t>
+            </a:r>
+          </a:p>
+          <a:p>
+            <a:pPr algn="l">
+              <a:lnSpc>
+                <a:spcPct val="130000"/>
+              </a:lnSpc>
+              <a:spcBef>
+                <a:spcPts val="1000"/>
+              </a:spcBef>
+            </a:pPr>
+            <a:r>
+              <a:rPr sz="1500" b="0">
+                <a:solidFill>
+                  <a:srgbClr val="4A4A55"/>
+                </a:solidFill>
+                <a:latin typeface="Arial"/>
+              </a:rPr>
+              <a:t>It captures which lines each individual test exercised, as it runs.</a:t>
+            </a:r>
+          </a:p>
+        </p:txBody>
+      </p:sp>
+      <p:sp>
+        <p:nvSpPr>
+          <p:cNvPr id="10" name="Rounded Rectangle 9"/>
+          <p:cNvSpPr/>
+          <p:nvPr/>
+        </p:nvSpPr>
+        <p:spPr>
+          <a:xfrm>
+            <a:off x="8097316" y="2743200"/>
+            <a:ext cx="3271418" cy="2788920"/>
+          </a:xfrm>
+          <a:prstGeom prst="roundRect">
+            <a:avLst>
+              <a:gd name="adj" fmla="val 5500"/>
+            </a:avLst>
+          </a:prstGeom>
+          <a:solidFill>
+            <a:srgbClr val="FFFFFF"/>
+          </a:solidFill>
+          <a:ln w="12700">
+            <a:solidFill>
+              <a:srgbClr val="E3E0D9"/>
+            </a:solidFill>
+          </a:ln>
+          <a:effectLst/>
+        </p:spPr>
+        <p:style>
+          <a:lnRef idx="1">
+            <a:schemeClr val="accent1"/>
+          </a:lnRef>
+          <a:fillRef idx="3">
+            <a:schemeClr val="accent1"/>
+          </a:fillRef>
+          <a:effectRef idx="2">
+            <a:schemeClr val="accent1"/>
+          </a:effectRef>
+          <a:fontRef idx="minor">
+            <a:schemeClr val="lt1"/>
+          </a:fontRef>
+        </p:style>
+        <p:txBody>
+          <a:bodyPr rtlCol="0" anchor="ctr"/>
+          <a:lstStyle/>
+          <a:p>
+            <a:pPr algn="ctr"/>
+          </a:p>
+        </p:txBody>
+      </p:sp>
+      <p:sp>
+        <p:nvSpPr>
+          <p:cNvPr id="11" name="TextBox 10"/>
+          <p:cNvSpPr txBox="1"/>
+          <p:nvPr/>
+        </p:nvSpPr>
+        <p:spPr>
+          <a:xfrm>
+            <a:off x="8426500" y="3108960"/>
+            <a:ext cx="2613050" cy="2103120"/>
+          </a:xfrm>
+          <a:prstGeom prst="rect">
+            <a:avLst/>
+          </a:prstGeom>
+          <a:noFill/>
+        </p:spPr>
+        <p:txBody>
+          <a:bodyPr wrap="square" anchor="t" lIns="0" rIns="0" tIns="0" bIns="0">
+            <a:spAutoFit/>
+          </a:bodyPr>
+          <a:lstStyle/>
+          <a:p>
+            <a:pPr algn="l">
+              <a:lnSpc>
+                <a:spcPct val="100000"/>
+              </a:lnSpc>
+              <a:spcBef>
+                <a:spcPts val="0"/>
+              </a:spcBef>
+            </a:pPr>
+            <a:r>
+              <a:rPr sz="3000" b="1">
+                <a:solidFill>
+                  <a:srgbClr val="C2410C"/>
+                </a:solidFill>
+                <a:latin typeface="Arial"/>
+              </a:rPr>
+              <a:t>03</a:t>
+            </a:r>
+          </a:p>
+          <a:p>
+            <a:pPr algn="l">
+              <a:lnSpc>
+                <a:spcPct val="120000"/>
+              </a:lnSpc>
+              <a:spcBef>
+                <a:spcPts val="1000"/>
+              </a:spcBef>
+            </a:pPr>
+            <a:r>
+              <a:rPr sz="1900" b="1">
+                <a:solidFill>
+                  <a:srgbClr val="1A1A1F"/>
+                </a:solidFill>
+                <a:latin typeface="Arial"/>
+              </a:rPr>
+              <a:t>You get the map.</a:t>
+            </a:r>
+          </a:p>
+          <a:p>
+            <a:pPr algn="l">
+              <a:lnSpc>
+                <a:spcPct val="130000"/>
+              </a:lnSpc>
+              <a:spcBef>
+                <a:spcPts val="1000"/>
+              </a:spcBef>
+            </a:pPr>
+            <a:r>
+              <a:rPr sz="1500" b="0">
+                <a:solidFill>
+                  <a:srgbClr val="4A4A55"/>
+                </a:solidFill>
+                <a:latin typeface="Arial"/>
+              </a:rPr>
+              <a:t>An interactive test → code map, plus a list of dead tests and untested lines.</a:t>
+            </a:r>
+          </a:p>
+        </p:txBody>
+      </p:sp>
+      <p:sp>
+        <p:nvSpPr>
+          <p:cNvPr id="12" name="TextBox 11"/>
+          <p:cNvSpPr txBox="1"/>
+          <p:nvPr/>
+        </p:nvSpPr>
+        <p:spPr>
+          <a:xfrm>
+            <a:off x="10454335" y="6199632"/>
+            <a:ext cx="914400" cy="274320"/>
+          </a:xfrm>
+          <a:prstGeom prst="rect">
+            <a:avLst/>
+          </a:prstGeom>
+          <a:noFill/>
+        </p:spPr>
+        <p:txBody>
+          <a:bodyPr wrap="square" anchor="t" lIns="0" rIns="0" tIns="0" bIns="0">
+            <a:spAutoFit/>
+          </a:bodyPr>
+          <a:lstStyle/>
+          <a:p>
+            <a:pPr algn="r">
+              <a:lnSpc>
+                <a:spcPct val="100000"/>
+              </a:lnSpc>
+              <a:spcBef>
+                <a:spcPts val="0"/>
+              </a:spcBef>
+            </a:pPr>
+            <a:r>
+              <a:rPr sz="1100" b="0">
+                <a:solidFill>
+                  <a:srgbClr val="9A9AA4"/>
+                </a:solidFill>
+                <a:latin typeface="Arial"/>
+              </a:rPr>
+              <a:t>4</a:t>
             </a:r>
           </a:p>
         </p:txBody>
@@ -3609,14 +4519,6 @@
 <file path=ppt/slides/slide5.xml><?xml version="1.0" encoding="utf-8"?>
 <p:sld xmlns:a="http://schemas.openxmlformats.org/drawingml/2006/main" xmlns:p="http://schemas.openxmlformats.org/presentationml/2006/main" xmlns:r="http://schemas.openxmlformats.org/officeDocument/2006/relationships">
   <p:cSld>
-    <p:bg>
-      <p:bgPr>
-        <a:solidFill>
-          <a:srgbClr val="FFFFFF"/>
-        </a:solidFill>
-        <a:effectLst/>
-      </p:bgPr>
-    </p:bg>
     <p:spTree>
       <p:nvGrpSpPr>
         <p:cNvPr id="1" name=""/>
@@ -3626,14 +4528,58 @@
       <p:grpSpPr/>
       <p:sp>
         <p:nvSpPr>
-          <p:cNvPr id="2" name="TextBox 1"/>
+          <p:cNvPr id="2" name="Rectangle 1"/>
+          <p:cNvSpPr/>
+          <p:nvPr/>
+        </p:nvSpPr>
+        <p:spPr>
+          <a:xfrm>
+            <a:off x="0" y="0"/>
+            <a:ext cx="12191695" cy="6858000"/>
+          </a:xfrm>
+          <a:prstGeom prst="rect">
+            <a:avLst/>
+          </a:prstGeom>
+          <a:solidFill>
+            <a:srgbClr val="F7F6F3"/>
+          </a:solidFill>
+          <a:ln>
+            <a:noFill/>
+          </a:ln>
+          <a:effectLst/>
+        </p:spPr>
+        <p:style>
+          <a:lnRef idx="1">
+            <a:schemeClr val="accent1"/>
+          </a:lnRef>
+          <a:fillRef idx="3">
+            <a:schemeClr val="accent1"/>
+          </a:fillRef>
+          <a:effectRef idx="2">
+            <a:schemeClr val="accent1"/>
+          </a:effectRef>
+          <a:fontRef idx="minor">
+            <a:schemeClr val="lt1"/>
+          </a:fontRef>
+        </p:style>
+        <p:txBody>
+          <a:bodyPr rtlCol="0" anchor="ctr"/>
+          <a:lstStyle/>
+          <a:p>
+            <a:pPr algn="ctr"/>
+          </a:p>
+        </p:txBody>
+      </p:sp>
+      <p:sp>
+        <p:nvSpPr>
+          <p:cNvPr id="3" name="TextBox 2"/>
           <p:cNvSpPr txBox="1"/>
           <p:nvPr/>
         </p:nvSpPr>
         <p:spPr>
           <a:xfrm>
-            <a:off x="685800" y="457200"/>
-            <a:ext cx="7772400" cy="914400"/>
+            <a:off x="822960" y="566928"/>
+            <a:ext cx="10545775" cy="274320"/>
           </a:xfrm>
           <a:prstGeom prst="rect">
             <a:avLst/>
@@ -3641,35 +4587,41 @@
           <a:noFill/>
         </p:spPr>
         <p:txBody>
-          <a:bodyPr wrap="square">
+          <a:bodyPr wrap="square" anchor="t" lIns="0" rIns="0" tIns="0" bIns="0">
             <a:spAutoFit/>
           </a:bodyPr>
           <a:lstStyle/>
           <a:p>
-            <a:pPr>
-              <a:defRPr sz="5400" b="1">
+            <a:pPr algn="ctr">
+              <a:lnSpc>
+                <a:spcPct val="100000"/>
+              </a:lnSpc>
+              <a:spcBef>
+                <a:spcPts val="0"/>
+              </a:spcBef>
+            </a:pPr>
+            <a:r>
+              <a:rPr sz="1300" b="1">
                 <a:solidFill>
-                  <a:srgbClr val="009688"/>
+                  <a:srgbClr val="C2410C"/>
                 </a:solidFill>
-                <a:latin typeface="Calibri"/>
-              </a:defRPr>
-            </a:pPr>
-            <a:r>
-              <a:t>Install Marrow</a:t>
-            </a:r>
-          </a:p>
-        </p:txBody>
-      </p:sp>
-      <p:sp>
-        <p:nvSpPr>
-          <p:cNvPr id="3" name="TextBox 2"/>
+                <a:latin typeface="Arial"/>
+              </a:rPr>
+              <a:t>GET STARTED</a:t>
+            </a:r>
+          </a:p>
+        </p:txBody>
+      </p:sp>
+      <p:sp>
+        <p:nvSpPr>
+          <p:cNvPr id="4" name="TextBox 3"/>
           <p:cNvSpPr txBox="1"/>
           <p:nvPr/>
         </p:nvSpPr>
         <p:spPr>
           <a:xfrm>
-            <a:off x="1371600" y="1645920"/>
-            <a:ext cx="7315200" cy="4572000"/>
+            <a:off x="822960" y="1234440"/>
+            <a:ext cx="10545775" cy="1371600"/>
           </a:xfrm>
           <a:prstGeom prst="rect">
             <a:avLst/>
@@ -3677,46 +4629,226 @@
           <a:noFill/>
         </p:spPr>
         <p:txBody>
-          <a:bodyPr wrap="square">
+          <a:bodyPr wrap="square" anchor="t" lIns="0" rIns="0" tIns="0" bIns="0">
             <a:spAutoFit/>
           </a:bodyPr>
           <a:lstStyle/>
           <a:p>
-            <a:pPr>
+            <a:pPr algn="ctr">
+              <a:lnSpc>
+                <a:spcPct val="110000"/>
+              </a:lnSpc>
               <a:spcBef>
-                <a:spcPts val="1200"/>
+                <a:spcPts val="0"/>
               </a:spcBef>
-              <a:spcAft>
-                <a:spcPts val="1200"/>
-              </a:spcAft>
-              <a:defRPr sz="2800">
+            </a:pPr>
+            <a:r>
+              <a:rPr sz="4800" b="1">
                 <a:solidFill>
-                  <a:srgbClr val="1E1E1E"/>
+                  <a:srgbClr val="1A1A1F"/>
                 </a:solidFill>
-                <a:latin typeface="Calibri"/>
-              </a:defRPr>
+                <a:latin typeface="Arial"/>
+              </a:rPr>
+              <a:t>Install Marrow.</a:t>
+            </a:r>
+          </a:p>
+        </p:txBody>
+      </p:sp>
+      <p:sp>
+        <p:nvSpPr>
+          <p:cNvPr id="5" name="Rounded Rectangle 4"/>
+          <p:cNvSpPr/>
+          <p:nvPr/>
+        </p:nvSpPr>
+        <p:spPr>
+          <a:xfrm>
+            <a:off x="3626967" y="2880360"/>
+            <a:ext cx="4937760" cy="914400"/>
+          </a:xfrm>
+          <a:prstGeom prst="roundRect">
+            <a:avLst>
+              <a:gd name="adj" fmla="val 22000"/>
+            </a:avLst>
+          </a:prstGeom>
+          <a:solidFill>
+            <a:srgbClr val="1A1A1F"/>
+          </a:solidFill>
+          <a:ln>
+            <a:noFill/>
+          </a:ln>
+          <a:effectLst/>
+        </p:spPr>
+        <p:style>
+          <a:lnRef idx="1">
+            <a:schemeClr val="accent1"/>
+          </a:lnRef>
+          <a:fillRef idx="3">
+            <a:schemeClr val="accent1"/>
+          </a:fillRef>
+          <a:effectRef idx="2">
+            <a:schemeClr val="accent1"/>
+          </a:effectRef>
+          <a:fontRef idx="minor">
+            <a:schemeClr val="lt1"/>
+          </a:fontRef>
+        </p:style>
+        <p:txBody>
+          <a:bodyPr rtlCol="0" anchor="ctr" wrap="square" lIns="0" rIns="0"/>
+          <a:lstStyle/>
+          <a:p>
+            <a:pPr algn="ctr">
+              <a:lnSpc>
+                <a:spcPct val="100000"/>
+              </a:lnSpc>
+              <a:spcBef>
+                <a:spcPts val="0"/>
+              </a:spcBef>
             </a:pPr>
             <a:r>
+              <a:rPr sz="2400" b="1">
+                <a:solidFill>
+                  <a:srgbClr val="9A9AA4"/>
+                </a:solidFill>
+                <a:latin typeface="Consolas"/>
+              </a:rPr>
+              <a:t>$ </a:t>
+            </a:r>
+            <a:r>
+              <a:rPr sz="2400" b="1">
+                <a:solidFill>
+                  <a:srgbClr val="FFFFFF"/>
+                </a:solidFill>
+                <a:latin typeface="Consolas"/>
+              </a:rPr>
               <a:t>pipx install marrow</a:t>
             </a:r>
           </a:p>
-          <a:p>
-            <a:pPr>
+        </p:txBody>
+      </p:sp>
+      <p:sp>
+        <p:nvSpPr>
+          <p:cNvPr id="6" name="TextBox 5"/>
+          <p:cNvSpPr txBox="1"/>
+          <p:nvPr/>
+        </p:nvSpPr>
+        <p:spPr>
+          <a:xfrm>
+            <a:off x="822960" y="4343400"/>
+            <a:ext cx="10545775" cy="548640"/>
+          </a:xfrm>
+          <a:prstGeom prst="rect">
+            <a:avLst/>
+          </a:prstGeom>
+          <a:noFill/>
+        </p:spPr>
+        <p:txBody>
+          <a:bodyPr wrap="square" anchor="t" lIns="0" rIns="0" tIns="0" bIns="0">
+            <a:spAutoFit/>
+          </a:bodyPr>
+          <a:lstStyle/>
+          <a:p>
+            <a:pPr algn="ctr">
+              <a:lnSpc>
+                <a:spcPct val="120000"/>
+              </a:lnSpc>
               <a:spcBef>
-                <a:spcPts val="1200"/>
+                <a:spcPts val="0"/>
               </a:spcBef>
-              <a:spcAft>
-                <a:spcPts val="1200"/>
-              </a:spcAft>
-              <a:defRPr sz="2800">
+            </a:pPr>
+            <a:r>
+              <a:rPr sz="2200" b="0">
                 <a:solidFill>
-                  <a:srgbClr val="1E1E1E"/>
+                  <a:srgbClr val="4A4A55"/>
                 </a:solidFill>
-                <a:latin typeface="Calibri"/>
-              </a:defRPr>
+                <a:latin typeface="Arial"/>
+              </a:rPr>
+              <a:t>Works with pytest, Jest, and go test.</a:t>
+            </a:r>
+          </a:p>
+        </p:txBody>
+      </p:sp>
+      <p:sp>
+        <p:nvSpPr>
+          <p:cNvPr id="7" name="Rectangle 6"/>
+          <p:cNvSpPr/>
+          <p:nvPr/>
+        </p:nvSpPr>
+        <p:spPr>
+          <a:xfrm>
+            <a:off x="5592927" y="5257800"/>
+            <a:ext cx="1005840" cy="44450"/>
+          </a:xfrm>
+          <a:prstGeom prst="rect">
+            <a:avLst/>
+          </a:prstGeom>
+          <a:solidFill>
+            <a:srgbClr val="C2410C"/>
+          </a:solidFill>
+          <a:ln>
+            <a:noFill/>
+          </a:ln>
+          <a:effectLst/>
+        </p:spPr>
+        <p:style>
+          <a:lnRef idx="1">
+            <a:schemeClr val="accent1"/>
+          </a:lnRef>
+          <a:fillRef idx="3">
+            <a:schemeClr val="accent1"/>
+          </a:fillRef>
+          <a:effectRef idx="2">
+            <a:schemeClr val="accent1"/>
+          </a:effectRef>
+          <a:fontRef idx="minor">
+            <a:schemeClr val="lt1"/>
+          </a:fontRef>
+        </p:style>
+        <p:txBody>
+          <a:bodyPr rtlCol="0" anchor="ctr"/>
+          <a:lstStyle/>
+          <a:p>
+            <a:pPr algn="ctr"/>
+          </a:p>
+        </p:txBody>
+      </p:sp>
+      <p:sp>
+        <p:nvSpPr>
+          <p:cNvPr id="8" name="TextBox 7"/>
+          <p:cNvSpPr txBox="1"/>
+          <p:nvPr/>
+        </p:nvSpPr>
+        <p:spPr>
+          <a:xfrm>
+            <a:off x="10454335" y="6199632"/>
+            <a:ext cx="914400" cy="274320"/>
+          </a:xfrm>
+          <a:prstGeom prst="rect">
+            <a:avLst/>
+          </a:prstGeom>
+          <a:noFill/>
+        </p:spPr>
+        <p:txBody>
+          <a:bodyPr wrap="square" anchor="t" lIns="0" rIns="0" tIns="0" bIns="0">
+            <a:spAutoFit/>
+          </a:bodyPr>
+          <a:lstStyle/>
+          <a:p>
+            <a:pPr algn="r">
+              <a:lnSpc>
+                <a:spcPct val="100000"/>
+              </a:lnSpc>
+              <a:spcBef>
+                <a:spcPts val="0"/>
+              </a:spcBef>
             </a:pPr>
             <a:r>
-              <a:t>Works with pytest, Jest, go test</a:t>
+              <a:rPr sz="1100" b="0">
+                <a:solidFill>
+                  <a:srgbClr val="9A9AA4"/>
+                </a:solidFill>
+                <a:latin typeface="Arial"/>
+              </a:rPr>
+              <a:t>5</a:t>
             </a:r>
           </a:p>
         </p:txBody>

--- a/harness/out/pptx/pitch_deck/cold/deck.pptx
+++ b/harness/out/pptx/pitch_deck/cold/deck.pptx
@@ -3107,7 +3107,7 @@
             <a:avLst/>
           </a:prstGeom>
           <a:solidFill>
-            <a:srgbClr val="F7F6F3"/>
+            <a:srgbClr val="FAFAF8"/>
           </a:solidFill>
           <a:ln>
             <a:noFill/>
@@ -3144,8 +3144,8 @@
         </p:nvSpPr>
         <p:spPr>
           <a:xfrm>
-            <a:off x="822960" y="2240280"/>
-            <a:ext cx="10545775" cy="1463040"/>
+            <a:off x="914400" y="2148840"/>
+            <a:ext cx="10362895" cy="1463040"/>
           </a:xfrm>
           <a:prstGeom prst="rect">
             <a:avLst/>
@@ -3159,17 +3159,14 @@
           <a:lstStyle/>
           <a:p>
             <a:pPr algn="ctr">
-              <a:lnSpc>
-                <a:spcPct val="100000"/>
-              </a:lnSpc>
-              <a:spcBef>
+              <a:spcAft>
                 <a:spcPts val="0"/>
-              </a:spcBef>
+              </a:spcAft>
             </a:pPr>
             <a:r>
-              <a:rPr sz="8800" b="1">
+              <a:rPr sz="7600" b="1">
                 <a:solidFill>
-                  <a:srgbClr val="1A1A1F"/>
+                  <a:srgbClr val="17181A"/>
                 </a:solidFill>
                 <a:latin typeface="Arial"/>
               </a:rPr>
@@ -3186,14 +3183,14 @@
         </p:nvSpPr>
         <p:spPr>
           <a:xfrm>
-            <a:off x="5455767" y="3767328"/>
-            <a:ext cx="1280160" cy="44450"/>
+            <a:off x="5181447" y="3639312"/>
+            <a:ext cx="1828800" cy="50800"/>
           </a:xfrm>
           <a:prstGeom prst="rect">
             <a:avLst/>
           </a:prstGeom>
           <a:solidFill>
-            <a:srgbClr val="C2410C"/>
+            <a:srgbClr val="B0402F"/>
           </a:solidFill>
           <a:ln>
             <a:noFill/>
@@ -3230,8 +3227,8 @@
         </p:nvSpPr>
         <p:spPr>
           <a:xfrm>
-            <a:off x="822960" y="4206240"/>
-            <a:ext cx="10545775" cy="822960"/>
+            <a:off x="914400" y="4041648"/>
+            <a:ext cx="10362895" cy="1097280"/>
           </a:xfrm>
           <a:prstGeom prst="rect">
             <a:avLst/>
@@ -3245,63 +3242,34 @@
           <a:lstStyle/>
           <a:p>
             <a:pPr algn="ctr">
-              <a:lnSpc>
-                <a:spcPct val="120000"/>
-              </a:lnSpc>
-              <a:spcBef>
-                <a:spcPts val="0"/>
-              </a:spcBef>
+              <a:spcAft>
+                <a:spcPts val="1400"/>
+              </a:spcAft>
             </a:pPr>
             <a:r>
-              <a:rPr sz="2600" b="0">
+              <a:rPr sz="2300" b="0">
                 <a:solidFill>
-                  <a:srgbClr val="4A4A55"/>
+                  <a:srgbClr val="5F6367"/>
                 </a:solidFill>
                 <a:latin typeface="Arial"/>
               </a:rPr>
               <a:t>Know what your tests actually cover.</a:t>
             </a:r>
           </a:p>
-        </p:txBody>
-      </p:sp>
-      <p:sp>
-        <p:nvSpPr>
-          <p:cNvPr id="6" name="TextBox 5"/>
-          <p:cNvSpPr txBox="1"/>
-          <p:nvPr/>
-        </p:nvSpPr>
-        <p:spPr>
-          <a:xfrm>
-            <a:off x="822960" y="5806440"/>
-            <a:ext cx="10545775" cy="320040"/>
-          </a:xfrm>
-          <a:prstGeom prst="rect">
-            <a:avLst/>
-          </a:prstGeom>
-          <a:noFill/>
-        </p:spPr>
-        <p:txBody>
-          <a:bodyPr wrap="square" anchor="t" lIns="0" rIns="0" tIns="0" bIns="0">
-            <a:spAutoFit/>
-          </a:bodyPr>
-          <a:lstStyle/>
           <a:p>
             <a:pPr algn="ctr">
-              <a:lnSpc>
-                <a:spcPct val="100000"/>
-              </a:lnSpc>
-              <a:spcBef>
+              <a:spcAft>
                 <a:spcPts val="0"/>
-              </a:spcBef>
+              </a:spcAft>
             </a:pPr>
             <a:r>
-              <a:rPr sz="1300" b="0">
+              <a:rPr sz="1500" b="0">
                 <a:solidFill>
-                  <a:srgbClr val="9A9AA4"/>
+                  <a:srgbClr val="5F6367"/>
                 </a:solidFill>
                 <a:latin typeface="Arial"/>
               </a:rPr>
-              <a:t>A CLI that maps a repo's tests to the code they cover</a:t>
+              <a:t>A CLI that maps a repo's tests to the code they cover.</a:t>
             </a:r>
           </a:p>
         </p:txBody>
@@ -3339,7 +3307,7 @@
             <a:avLst/>
           </a:prstGeom>
           <a:solidFill>
-            <a:srgbClr val="F7F6F3"/>
+            <a:srgbClr val="FAFAF8"/>
           </a:solidFill>
           <a:ln>
             <a:noFill/>
@@ -3376,8 +3344,8 @@
         </p:nvSpPr>
         <p:spPr>
           <a:xfrm>
-            <a:off x="822960" y="566928"/>
-            <a:ext cx="10545775" cy="274320"/>
+            <a:off x="914400" y="777240"/>
+            <a:ext cx="10362895" cy="1005840"/>
           </a:xfrm>
           <a:prstGeom prst="rect">
             <a:avLst/>
@@ -3392,58 +3360,16 @@
           <a:p>
             <a:pPr algn="ctr">
               <a:lnSpc>
-                <a:spcPct val="100000"/>
+                <a:spcPct val="105000"/>
               </a:lnSpc>
-              <a:spcBef>
+              <a:spcAft>
                 <a:spcPts val="0"/>
-              </a:spcBef>
+              </a:spcAft>
             </a:pPr>
             <a:r>
-              <a:rPr sz="1300" b="1">
+              <a:rPr sz="3800" b="1">
                 <a:solidFill>
-                  <a:srgbClr val="C2410C"/>
-                </a:solidFill>
-                <a:latin typeface="Arial"/>
-              </a:rPr>
-              <a:t>THE PROBLEM</a:t>
-            </a:r>
-          </a:p>
-        </p:txBody>
-      </p:sp>
-      <p:sp>
-        <p:nvSpPr>
-          <p:cNvPr id="4" name="TextBox 3"/>
-          <p:cNvSpPr txBox="1"/>
-          <p:nvPr/>
-        </p:nvSpPr>
-        <p:spPr>
-          <a:xfrm>
-            <a:off x="822960" y="1024128"/>
-            <a:ext cx="10545775" cy="1371600"/>
-          </a:xfrm>
-          <a:prstGeom prst="rect">
-            <a:avLst/>
-          </a:prstGeom>
-          <a:noFill/>
-        </p:spPr>
-        <p:txBody>
-          <a:bodyPr wrap="square" anchor="t" lIns="0" rIns="0" tIns="0" bIns="0">
-            <a:spAutoFit/>
-          </a:bodyPr>
-          <a:lstStyle/>
-          <a:p>
-            <a:pPr algn="ctr">
-              <a:lnSpc>
-                <a:spcPct val="110000"/>
-              </a:lnSpc>
-              <a:spcBef>
-                <a:spcPts val="0"/>
-              </a:spcBef>
-            </a:pPr>
-            <a:r>
-              <a:rPr sz="4000" b="1">
-                <a:solidFill>
-                  <a:srgbClr val="1A1A1F"/>
+                  <a:srgbClr val="17181A"/>
                 </a:solidFill>
                 <a:latin typeface="Arial"/>
               </a:rPr>
@@ -3454,20 +3380,20 @@
       </p:sp>
       <p:sp>
         <p:nvSpPr>
-          <p:cNvPr id="5" name="Rectangle 4"/>
+          <p:cNvPr id="4" name="Rectangle 3"/>
           <p:cNvSpPr/>
           <p:nvPr/>
         </p:nvSpPr>
         <p:spPr>
           <a:xfrm>
-            <a:off x="5592927" y="2148840"/>
-            <a:ext cx="1005840" cy="44450"/>
+            <a:off x="5364327" y="1709928"/>
+            <a:ext cx="1463040" cy="50800"/>
           </a:xfrm>
           <a:prstGeom prst="rect">
             <a:avLst/>
           </a:prstGeom>
           <a:solidFill>
-            <a:srgbClr val="C2410C"/>
+            <a:srgbClr val="B0402F"/>
           </a:solidFill>
           <a:ln>
             <a:noFill/>
@@ -3498,14 +3424,14 @@
       </p:sp>
       <p:sp>
         <p:nvSpPr>
-          <p:cNvPr id="6" name="TextBox 5"/>
+          <p:cNvPr id="5" name="TextBox 4"/>
           <p:cNvSpPr txBox="1"/>
           <p:nvPr/>
         </p:nvSpPr>
         <p:spPr>
           <a:xfrm>
-            <a:off x="1965960" y="2788920"/>
-            <a:ext cx="8259775" cy="2011680"/>
+            <a:off x="10362895" y="6199632"/>
+            <a:ext cx="914400" cy="274320"/>
           </a:xfrm>
           <a:prstGeom prst="rect">
             <a:avLst/>
@@ -3518,55 +3444,33 @@
           </a:bodyPr>
           <a:lstStyle/>
           <a:p>
-            <a:pPr algn="ctr">
-              <a:lnSpc>
-                <a:spcPct val="135000"/>
-              </a:lnSpc>
-              <a:spcBef>
+            <a:pPr algn="r">
+              <a:spcAft>
                 <a:spcPts val="0"/>
-              </a:spcBef>
+              </a:spcAft>
             </a:pPr>
             <a:r>
-              <a:rPr sz="2400" b="0">
+              <a:rPr sz="1100" b="0">
                 <a:solidFill>
-                  <a:srgbClr val="4A4A55"/>
+                  <a:srgbClr val="5F6367"/>
                 </a:solidFill>
                 <a:latin typeface="Arial"/>
               </a:rPr>
-              <a:t>Large suites are slow, and nobody knows which tests cover which code.</a:t>
-            </a:r>
-          </a:p>
-          <a:p>
-            <a:pPr algn="ctr">
-              <a:lnSpc>
-                <a:spcPct val="135000"/>
-              </a:lnSpc>
-              <a:spcBef>
-                <a:spcPts val="1800"/>
-              </a:spcBef>
-            </a:pPr>
-            <a:r>
-              <a:rPr sz="2400" b="0">
-                <a:solidFill>
-                  <a:srgbClr val="4A4A55"/>
-                </a:solidFill>
-                <a:latin typeface="Arial"/>
-              </a:rPr>
-              <a:t>So dead tests linger for years — and the real gaps go unnoticed.</a:t>
-            </a:r>
-          </a:p>
-        </p:txBody>
-      </p:sp>
-      <p:sp>
-        <p:nvSpPr>
-          <p:cNvPr id="7" name="TextBox 6"/>
+              <a:t>2/5</a:t>
+            </a:r>
+          </a:p>
+        </p:txBody>
+      </p:sp>
+      <p:sp>
+        <p:nvSpPr>
+          <p:cNvPr id="6" name="TextBox 5"/>
           <p:cNvSpPr txBox="1"/>
           <p:nvPr/>
         </p:nvSpPr>
         <p:spPr>
           <a:xfrm>
-            <a:off x="10454335" y="6199632"/>
-            <a:ext cx="914400" cy="274320"/>
+            <a:off x="1691640" y="2651760"/>
+            <a:ext cx="8808415" cy="2194560"/>
           </a:xfrm>
           <a:prstGeom prst="rect">
             <a:avLst/>
@@ -3579,22 +3483,41 @@
           </a:bodyPr>
           <a:lstStyle/>
           <a:p>
-            <a:pPr algn="r">
+            <a:pPr algn="ctr">
               <a:lnSpc>
-                <a:spcPct val="100000"/>
+                <a:spcPct val="125000"/>
               </a:lnSpc>
-              <a:spcBef>
-                <a:spcPts val="0"/>
-              </a:spcBef>
+              <a:spcAft>
+                <a:spcPts val="1800"/>
+              </a:spcAft>
             </a:pPr>
             <a:r>
-              <a:rPr sz="1100" b="0">
+              <a:rPr sz="2300" b="1">
                 <a:solidFill>
-                  <a:srgbClr val="9A9AA4"/>
+                  <a:srgbClr val="B0402F"/>
                 </a:solidFill>
                 <a:latin typeface="Arial"/>
               </a:rPr>
-              <a:t>2</a:t>
+              <a:t>Nobody knows which tests cover which code.</a:t>
+            </a:r>
+          </a:p>
+          <a:p>
+            <a:pPr algn="ctr">
+              <a:lnSpc>
+                <a:spcPct val="145000"/>
+              </a:lnSpc>
+              <a:spcAft>
+                <a:spcPts val="0"/>
+              </a:spcAft>
+            </a:pPr>
+            <a:r>
+              <a:rPr sz="1800" b="0">
+                <a:solidFill>
+                  <a:srgbClr val="5F6367"/>
+                </a:solidFill>
+                <a:latin typeface="Arial"/>
+              </a:rPr>
+              <a:t>Large suites are slow, and the mapping from test to code lives only in people's heads. So dead tests linger for years, and real gaps in coverage go unnoticed.</a:t>
             </a:r>
           </a:p>
         </p:txBody>
@@ -3632,7 +3555,7 @@
             <a:avLst/>
           </a:prstGeom>
           <a:solidFill>
-            <a:srgbClr val="F7F6F3"/>
+            <a:srgbClr val="FAFAF8"/>
           </a:solidFill>
           <a:ln>
             <a:noFill/>
@@ -3669,8 +3592,8 @@
         </p:nvSpPr>
         <p:spPr>
           <a:xfrm>
-            <a:off x="822960" y="566928"/>
-            <a:ext cx="10545775" cy="274320"/>
+            <a:off x="914400" y="777240"/>
+            <a:ext cx="10362895" cy="1005840"/>
           </a:xfrm>
           <a:prstGeom prst="rect">
             <a:avLst/>
@@ -3685,58 +3608,16 @@
           <a:p>
             <a:pPr algn="ctr">
               <a:lnSpc>
-                <a:spcPct val="100000"/>
+                <a:spcPct val="105000"/>
               </a:lnSpc>
-              <a:spcBef>
+              <a:spcAft>
                 <a:spcPts val="0"/>
-              </a:spcBef>
+              </a:spcAft>
             </a:pPr>
             <a:r>
-              <a:rPr sz="1300" b="1">
+              <a:rPr sz="3800" b="1">
                 <a:solidFill>
-                  <a:srgbClr val="C2410C"/>
-                </a:solidFill>
-                <a:latin typeface="Arial"/>
-              </a:rPr>
-              <a:t>THE IDEA</a:t>
-            </a:r>
-          </a:p>
-        </p:txBody>
-      </p:sp>
-      <p:sp>
-        <p:nvSpPr>
-          <p:cNvPr id="4" name="TextBox 3"/>
-          <p:cNvSpPr txBox="1"/>
-          <p:nvPr/>
-        </p:nvSpPr>
-        <p:spPr>
-          <a:xfrm>
-            <a:off x="822960" y="1024128"/>
-            <a:ext cx="10545775" cy="1371600"/>
-          </a:xfrm>
-          <a:prstGeom prst="rect">
-            <a:avLst/>
-          </a:prstGeom>
-          <a:noFill/>
-        </p:spPr>
-        <p:txBody>
-          <a:bodyPr wrap="square" anchor="t" lIns="0" rIns="0" tIns="0" bIns="0">
-            <a:spAutoFit/>
-          </a:bodyPr>
-          <a:lstStyle/>
-          <a:p>
-            <a:pPr algn="ctr">
-              <a:lnSpc>
-                <a:spcPct val="110000"/>
-              </a:lnSpc>
-              <a:spcBef>
-                <a:spcPts val="0"/>
-              </a:spcBef>
-            </a:pPr>
-            <a:r>
-              <a:rPr sz="4000" b="1">
-                <a:solidFill>
-                  <a:srgbClr val="1A1A1F"/>
+                  <a:srgbClr val="17181A"/>
                 </a:solidFill>
                 <a:latin typeface="Arial"/>
               </a:rPr>
@@ -3747,20 +3628,20 @@
       </p:sp>
       <p:sp>
         <p:nvSpPr>
-          <p:cNvPr id="5" name="Rectangle 4"/>
+          <p:cNvPr id="4" name="Rectangle 3"/>
           <p:cNvSpPr/>
           <p:nvPr/>
         </p:nvSpPr>
         <p:spPr>
           <a:xfrm>
-            <a:off x="5592927" y="2148840"/>
-            <a:ext cx="1005840" cy="44450"/>
+            <a:off x="5364327" y="1709928"/>
+            <a:ext cx="1463040" cy="50800"/>
           </a:xfrm>
           <a:prstGeom prst="rect">
             <a:avLst/>
           </a:prstGeom>
           <a:solidFill>
-            <a:srgbClr val="C2410C"/>
+            <a:srgbClr val="B0402F"/>
           </a:solidFill>
           <a:ln>
             <a:noFill/>
@@ -3791,14 +3672,14 @@
       </p:sp>
       <p:sp>
         <p:nvSpPr>
-          <p:cNvPr id="6" name="TextBox 5"/>
+          <p:cNvPr id="5" name="TextBox 4"/>
           <p:cNvSpPr txBox="1"/>
           <p:nvPr/>
         </p:nvSpPr>
         <p:spPr>
           <a:xfrm>
-            <a:off x="1965960" y="2788920"/>
-            <a:ext cx="8259775" cy="2011680"/>
+            <a:off x="10362895" y="6199632"/>
+            <a:ext cx="914400" cy="274320"/>
           </a:xfrm>
           <a:prstGeom prst="rect">
             <a:avLst/>
@@ -3811,55 +3692,33 @@
           </a:bodyPr>
           <a:lstStyle/>
           <a:p>
-            <a:pPr algn="ctr">
-              <a:lnSpc>
-                <a:spcPct val="135000"/>
-              </a:lnSpc>
-              <a:spcBef>
+            <a:pPr algn="r">
+              <a:spcAft>
                 <a:spcPts val="0"/>
-              </a:spcBef>
+              </a:spcAft>
             </a:pPr>
             <a:r>
-              <a:rPr sz="2400" b="0">
+              <a:rPr sz="1100" b="0">
                 <a:solidFill>
-                  <a:srgbClr val="4A4A55"/>
+                  <a:srgbClr val="5F6367"/>
                 </a:solidFill>
                 <a:latin typeface="Arial"/>
               </a:rPr>
-              <a:t>Marrow instruments a single test run and produces a test → code coverage map.</a:t>
-            </a:r>
-          </a:p>
-          <a:p>
-            <a:pPr algn="ctr">
-              <a:lnSpc>
-                <a:spcPct val="135000"/>
-              </a:lnSpc>
-              <a:spcBef>
-                <a:spcPts val="1800"/>
-              </a:spcBef>
-            </a:pPr>
-            <a:r>
-              <a:rPr sz="2400" b="1">
-                <a:solidFill>
-                  <a:srgbClr val="C2410C"/>
-                </a:solidFill>
-                <a:latin typeface="Arial"/>
-              </a:rPr>
-              <a:t>No annotations. No config.</a:t>
-            </a:r>
-          </a:p>
-        </p:txBody>
-      </p:sp>
-      <p:sp>
-        <p:nvSpPr>
-          <p:cNvPr id="7" name="TextBox 6"/>
+              <a:t>3/5</a:t>
+            </a:r>
+          </a:p>
+        </p:txBody>
+      </p:sp>
+      <p:sp>
+        <p:nvSpPr>
+          <p:cNvPr id="6" name="TextBox 5"/>
           <p:cNvSpPr txBox="1"/>
           <p:nvPr/>
         </p:nvSpPr>
         <p:spPr>
           <a:xfrm>
-            <a:off x="10454335" y="6199632"/>
-            <a:ext cx="914400" cy="274320"/>
+            <a:off x="1691640" y="2651760"/>
+            <a:ext cx="8808415" cy="2194560"/>
           </a:xfrm>
           <a:prstGeom prst="rect">
             <a:avLst/>
@@ -3872,22 +3731,41 @@
           </a:bodyPr>
           <a:lstStyle/>
           <a:p>
-            <a:pPr algn="r">
+            <a:pPr algn="ctr">
               <a:lnSpc>
-                <a:spcPct val="100000"/>
+                <a:spcPct val="125000"/>
               </a:lnSpc>
-              <a:spcBef>
-                <a:spcPts val="0"/>
-              </a:spcBef>
+              <a:spcAft>
+                <a:spcPts val="1800"/>
+              </a:spcAft>
             </a:pPr>
             <a:r>
-              <a:rPr sz="1100" b="0">
+              <a:rPr sz="2300" b="1">
                 <a:solidFill>
-                  <a:srgbClr val="9A9AA4"/>
+                  <a:srgbClr val="B0402F"/>
                 </a:solidFill>
                 <a:latin typeface="Arial"/>
               </a:rPr>
-              <a:t>3</a:t>
+              <a:t>One instrumented test run is enough.</a:t>
+            </a:r>
+          </a:p>
+          <a:p>
+            <a:pPr algn="ctr">
+              <a:lnSpc>
+                <a:spcPct val="145000"/>
+              </a:lnSpc>
+              <a:spcAft>
+                <a:spcPts val="0"/>
+              </a:spcAft>
+            </a:pPr>
+            <a:r>
+              <a:rPr sz="1800" b="0">
+                <a:solidFill>
+                  <a:srgbClr val="5F6367"/>
+                </a:solidFill>
+                <a:latin typeface="Arial"/>
+              </a:rPr>
+              <a:t>Marrow instruments a single test run and produces a test→code coverage map — no annotations, no config.</a:t>
             </a:r>
           </a:p>
         </p:txBody>
@@ -3925,7 +3803,7 @@
             <a:avLst/>
           </a:prstGeom>
           <a:solidFill>
-            <a:srgbClr val="F7F6F3"/>
+            <a:srgbClr val="FAFAF8"/>
           </a:solidFill>
           <a:ln>
             <a:noFill/>
@@ -3962,8 +3840,8 @@
         </p:nvSpPr>
         <p:spPr>
           <a:xfrm>
-            <a:off x="822960" y="566928"/>
-            <a:ext cx="10545775" cy="274320"/>
+            <a:off x="914400" y="777240"/>
+            <a:ext cx="10362895" cy="1005840"/>
           </a:xfrm>
           <a:prstGeom prst="rect">
             <a:avLst/>
@@ -3978,82 +3856,40 @@
           <a:p>
             <a:pPr algn="ctr">
               <a:lnSpc>
-                <a:spcPct val="100000"/>
+                <a:spcPct val="105000"/>
               </a:lnSpc>
-              <a:spcBef>
+              <a:spcAft>
                 <a:spcPts val="0"/>
-              </a:spcBef>
+              </a:spcAft>
             </a:pPr>
             <a:r>
-              <a:rPr sz="1300" b="1">
+              <a:rPr sz="3800" b="1">
                 <a:solidFill>
-                  <a:srgbClr val="C2410C"/>
+                  <a:srgbClr val="17181A"/>
                 </a:solidFill>
                 <a:latin typeface="Arial"/>
               </a:rPr>
-              <a:t>HOW IT WORKS</a:t>
-            </a:r>
-          </a:p>
-        </p:txBody>
-      </p:sp>
-      <p:sp>
-        <p:nvSpPr>
-          <p:cNvPr id="4" name="TextBox 3"/>
-          <p:cNvSpPr txBox="1"/>
-          <p:nvPr/>
-        </p:nvSpPr>
-        <p:spPr>
-          <a:xfrm>
-            <a:off x="822960" y="1024128"/>
-            <a:ext cx="10545775" cy="1371600"/>
-          </a:xfrm>
-          <a:prstGeom prst="rect">
-            <a:avLst/>
-          </a:prstGeom>
-          <a:noFill/>
-        </p:spPr>
-        <p:txBody>
-          <a:bodyPr wrap="square" anchor="t" lIns="0" rIns="0" tIns="0" bIns="0">
-            <a:spAutoFit/>
-          </a:bodyPr>
-          <a:lstStyle/>
-          <a:p>
-            <a:pPr algn="ctr">
-              <a:lnSpc>
-                <a:spcPct val="110000"/>
-              </a:lnSpc>
-              <a:spcBef>
-                <a:spcPts val="0"/>
-              </a:spcBef>
-            </a:pPr>
-            <a:r>
-              <a:rPr sz="4000" b="1">
-                <a:solidFill>
-                  <a:srgbClr val="1A1A1F"/>
-                </a:solidFill>
-                <a:latin typeface="Arial"/>
-              </a:rPr>
-              <a:t>Three steps, one command.</a:t>
-            </a:r>
-          </a:p>
-        </p:txBody>
-      </p:sp>
-      <p:sp>
-        <p:nvSpPr>
-          <p:cNvPr id="5" name="Rectangle 4"/>
+              <a:t>How it works</a:t>
+            </a:r>
+          </a:p>
+        </p:txBody>
+      </p:sp>
+      <p:sp>
+        <p:nvSpPr>
+          <p:cNvPr id="4" name="Rectangle 3"/>
           <p:cNvSpPr/>
           <p:nvPr/>
         </p:nvSpPr>
         <p:spPr>
           <a:xfrm>
-            <a:off x="5592927" y="2148840"/>
-            <a:ext cx="1005840" cy="44450"/>
+            <a:off x="5364327" y="1709928"/>
+            <a:ext cx="1463040" cy="50800"/>
           </a:xfrm>
           <a:prstGeom prst="rect">
             <a:avLst/>
           </a:prstGeom>
           <a:solidFill>
-            <a:srgbClr val="C2410C"/>
+            <a:srgbClr val="B0402F"/>
           </a:solidFill>
           <a:ln>
             <a:noFill/>
@@ -4084,27 +3920,62 @@
       </p:sp>
       <p:sp>
         <p:nvSpPr>
-          <p:cNvPr id="6" name="Rounded Rectangle 5"/>
+          <p:cNvPr id="5" name="TextBox 4"/>
+          <p:cNvSpPr txBox="1"/>
+          <p:nvPr/>
+        </p:nvSpPr>
+        <p:spPr>
+          <a:xfrm>
+            <a:off x="10362895" y="6199632"/>
+            <a:ext cx="914400" cy="274320"/>
+          </a:xfrm>
+          <a:prstGeom prst="rect">
+            <a:avLst/>
+          </a:prstGeom>
+          <a:noFill/>
+        </p:spPr>
+        <p:txBody>
+          <a:bodyPr wrap="square" anchor="t" lIns="0" rIns="0" tIns="0" bIns="0">
+            <a:spAutoFit/>
+          </a:bodyPr>
+          <a:lstStyle/>
+          <a:p>
+            <a:pPr algn="r">
+              <a:spcAft>
+                <a:spcPts val="0"/>
+              </a:spcAft>
+            </a:pPr>
+            <a:r>
+              <a:rPr sz="1100" b="0">
+                <a:solidFill>
+                  <a:srgbClr val="5F6367"/>
+                </a:solidFill>
+                <a:latin typeface="Arial"/>
+              </a:rPr>
+              <a:t>4/5</a:t>
+            </a:r>
+          </a:p>
+        </p:txBody>
+      </p:sp>
+      <p:sp>
+        <p:nvSpPr>
+          <p:cNvPr id="6" name="Rectangle 5"/>
           <p:cNvSpPr/>
           <p:nvPr/>
         </p:nvSpPr>
         <p:spPr>
           <a:xfrm>
-            <a:off x="822960" y="2743200"/>
-            <a:ext cx="3271418" cy="2788920"/>
-          </a:xfrm>
-          <a:prstGeom prst="roundRect">
-            <a:avLst>
-              <a:gd name="adj" fmla="val 5500"/>
-            </a:avLst>
+            <a:off x="914400" y="2395728"/>
+            <a:ext cx="3149498" cy="38100"/>
+          </a:xfrm>
+          <a:prstGeom prst="rect">
+            <a:avLst/>
           </a:prstGeom>
           <a:solidFill>
-            <a:srgbClr val="FFFFFF"/>
+            <a:srgbClr val="F0ECE6"/>
           </a:solidFill>
-          <a:ln w="12700">
-            <a:solidFill>
-              <a:srgbClr val="E3E0D9"/>
-            </a:solidFill>
+          <a:ln>
+            <a:noFill/>
           </a:ln>
           <a:effectLst/>
         </p:spPr>
@@ -4138,8 +4009,8 @@
         </p:nvSpPr>
         <p:spPr>
           <a:xfrm>
-            <a:off x="1152144" y="3108960"/>
-            <a:ext cx="2613050" cy="2103120"/>
+            <a:off x="914400" y="2578608"/>
+            <a:ext cx="3149498" cy="457200"/>
           </a:xfrm>
           <a:prstGeom prst="rect">
             <a:avLst/>
@@ -4153,86 +4024,101 @@
           <a:lstStyle/>
           <a:p>
             <a:pPr algn="l">
-              <a:lnSpc>
-                <a:spcPct val="100000"/>
-              </a:lnSpc>
-              <a:spcBef>
+              <a:spcAft>
                 <a:spcPts val="0"/>
-              </a:spcBef>
+              </a:spcAft>
             </a:pPr>
             <a:r>
-              <a:rPr sz="3000" b="1">
+              <a:rPr sz="1400" b="1">
                 <a:solidFill>
-                  <a:srgbClr val="C2410C"/>
+                  <a:srgbClr val="B0402F"/>
                 </a:solidFill>
                 <a:latin typeface="Arial"/>
               </a:rPr>
               <a:t>01</a:t>
             </a:r>
           </a:p>
+        </p:txBody>
+      </p:sp>
+      <p:sp>
+        <p:nvSpPr>
+          <p:cNvPr id="8" name="TextBox 7"/>
+          <p:cNvSpPr txBox="1"/>
+          <p:nvPr/>
+        </p:nvSpPr>
+        <p:spPr>
+          <a:xfrm>
+            <a:off x="914400" y="3035808"/>
+            <a:ext cx="3149498" cy="1828800"/>
+          </a:xfrm>
+          <a:prstGeom prst="rect">
+            <a:avLst/>
+          </a:prstGeom>
+          <a:noFill/>
+        </p:spPr>
+        <p:txBody>
+          <a:bodyPr wrap="square" anchor="t" lIns="0" rIns="0" tIns="0" bIns="0">
+            <a:spAutoFit/>
+          </a:bodyPr>
+          <a:lstStyle/>
           <a:p>
             <a:pPr algn="l">
-              <a:lnSpc>
-                <a:spcPct val="120000"/>
-              </a:lnSpc>
-              <a:spcBef>
+              <a:spcAft>
                 <a:spcPts val="1000"/>
-              </a:spcBef>
+              </a:spcAft>
             </a:pPr>
             <a:r>
-              <a:rPr sz="1900" b="1">
+              <a:rPr sz="2000" b="1">
                 <a:solidFill>
-                  <a:srgbClr val="1A1A1F"/>
+                  <a:srgbClr val="17181A"/>
                 </a:solidFill>
                 <a:latin typeface="Arial"/>
               </a:rPr>
-              <a:t>Run your suite through Marrow.</a:t>
+              <a:t>Run your suite</a:t>
             </a:r>
           </a:p>
           <a:p>
             <a:pPr algn="l">
               <a:lnSpc>
-                <a:spcPct val="130000"/>
+                <a:spcPct val="140000"/>
               </a:lnSpc>
-              <a:spcBef>
-                <a:spcPts val="1000"/>
-              </a:spcBef>
+              <a:spcAft>
+                <a:spcPts val="0"/>
+              </a:spcAft>
             </a:pPr>
             <a:r>
-              <a:rPr sz="1300" b="0">
+              <a:rPr sz="1500" b="0">
                 <a:solidFill>
-                  <a:srgbClr val="C2410C"/>
+                  <a:srgbClr val="5F6367"/>
                 </a:solidFill>
-                <a:latin typeface="Consolas"/>
+                <a:latin typeface="Arial"/>
               </a:rPr>
-              <a:t>marrow watch -- &lt;your test cmd&gt;</a:t>
-            </a:r>
-          </a:p>
-        </p:txBody>
-      </p:sp>
-      <p:sp>
-        <p:nvSpPr>
-          <p:cNvPr id="8" name="Rounded Rectangle 7"/>
+              <a:t>Prefix the test command you already use:</a:t>
+            </a:r>
+          </a:p>
+        </p:txBody>
+      </p:sp>
+      <p:sp>
+        <p:nvSpPr>
+          <p:cNvPr id="9" name="Rounded Rectangle 8"/>
           <p:cNvSpPr/>
           <p:nvPr/>
         </p:nvSpPr>
         <p:spPr>
           <a:xfrm>
-            <a:off x="4460138" y="2743200"/>
-            <a:ext cx="3271418" cy="2788920"/>
+            <a:off x="914400" y="4443984"/>
+            <a:ext cx="3149498" cy="566928"/>
           </a:xfrm>
           <a:prstGeom prst="roundRect">
             <a:avLst>
-              <a:gd name="adj" fmla="val 5500"/>
+              <a:gd name="adj" fmla="val 18000"/>
             </a:avLst>
           </a:prstGeom>
           <a:solidFill>
-            <a:srgbClr val="FFFFFF"/>
+            <a:srgbClr val="F0ECE6"/>
           </a:solidFill>
-          <a:ln w="12700">
-            <a:solidFill>
-              <a:srgbClr val="E3E0D9"/>
-            </a:solidFill>
+          <a:ln>
+            <a:noFill/>
           </a:ln>
           <a:effectLst/>
         </p:spPr>
@@ -4251,116 +4137,45 @@
           </a:fontRef>
         </p:style>
         <p:txBody>
-          <a:bodyPr rtlCol="0" anchor="ctr"/>
-          <a:lstStyle/>
-          <a:p>
-            <a:pPr algn="ctr"/>
-          </a:p>
-        </p:txBody>
-      </p:sp>
-      <p:sp>
-        <p:nvSpPr>
-          <p:cNvPr id="9" name="TextBox 8"/>
-          <p:cNvSpPr txBox="1"/>
+          <a:bodyPr rtlCol="0" anchor="ctr" wrap="square" lIns="164592" rIns="164592" tIns="0" bIns="0"/>
+          <a:lstStyle/>
+          <a:p>
+            <a:pPr algn="ctr">
+              <a:spcAft>
+                <a:spcPts val="0"/>
+              </a:spcAft>
+            </a:pPr>
+            <a:r>
+              <a:rPr sz="1100" b="0">
+                <a:solidFill>
+                  <a:srgbClr val="17181A"/>
+                </a:solidFill>
+                <a:latin typeface="Consolas"/>
+              </a:rPr>
+              <a:t>marrow watch -- &lt;your test cmd&gt;</a:t>
+            </a:r>
+          </a:p>
+        </p:txBody>
+      </p:sp>
+      <p:sp>
+        <p:nvSpPr>
+          <p:cNvPr id="10" name="Rectangle 9"/>
+          <p:cNvSpPr/>
           <p:nvPr/>
         </p:nvSpPr>
         <p:spPr>
           <a:xfrm>
-            <a:off x="4789322" y="3108960"/>
-            <a:ext cx="2613050" cy="2103120"/>
+            <a:off x="4521098" y="2395728"/>
+            <a:ext cx="3149498" cy="38100"/>
           </a:xfrm>
           <a:prstGeom prst="rect">
             <a:avLst/>
           </a:prstGeom>
-          <a:noFill/>
-        </p:spPr>
-        <p:txBody>
-          <a:bodyPr wrap="square" anchor="t" lIns="0" rIns="0" tIns="0" bIns="0">
-            <a:spAutoFit/>
-          </a:bodyPr>
-          <a:lstStyle/>
-          <a:p>
-            <a:pPr algn="l">
-              <a:lnSpc>
-                <a:spcPct val="100000"/>
-              </a:lnSpc>
-              <a:spcBef>
-                <a:spcPts val="0"/>
-              </a:spcBef>
-            </a:pPr>
-            <a:r>
-              <a:rPr sz="3000" b="1">
-                <a:solidFill>
-                  <a:srgbClr val="C2410C"/>
-                </a:solidFill>
-                <a:latin typeface="Arial"/>
-              </a:rPr>
-              <a:t>02</a:t>
-            </a:r>
-          </a:p>
-          <a:p>
-            <a:pPr algn="l">
-              <a:lnSpc>
-                <a:spcPct val="120000"/>
-              </a:lnSpc>
-              <a:spcBef>
-                <a:spcPts val="1000"/>
-              </a:spcBef>
-            </a:pPr>
-            <a:r>
-              <a:rPr sz="1900" b="1">
-                <a:solidFill>
-                  <a:srgbClr val="1A1A1F"/>
-                </a:solidFill>
-                <a:latin typeface="Arial"/>
-              </a:rPr>
-              <a:t>Marrow records the work.</a:t>
-            </a:r>
-          </a:p>
-          <a:p>
-            <a:pPr algn="l">
-              <a:lnSpc>
-                <a:spcPct val="130000"/>
-              </a:lnSpc>
-              <a:spcBef>
-                <a:spcPts val="1000"/>
-              </a:spcBef>
-            </a:pPr>
-            <a:r>
-              <a:rPr sz="1500" b="0">
-                <a:solidFill>
-                  <a:srgbClr val="4A4A55"/>
-                </a:solidFill>
-                <a:latin typeface="Arial"/>
-              </a:rPr>
-              <a:t>It captures which lines each individual test exercised, as it runs.</a:t>
-            </a:r>
-          </a:p>
-        </p:txBody>
-      </p:sp>
-      <p:sp>
-        <p:nvSpPr>
-          <p:cNvPr id="10" name="Rounded Rectangle 9"/>
-          <p:cNvSpPr/>
-          <p:nvPr/>
-        </p:nvSpPr>
-        <p:spPr>
-          <a:xfrm>
-            <a:off x="8097316" y="2743200"/>
-            <a:ext cx="3271418" cy="2788920"/>
-          </a:xfrm>
-          <a:prstGeom prst="roundRect">
-            <a:avLst>
-              <a:gd name="adj" fmla="val 5500"/>
-            </a:avLst>
-          </a:prstGeom>
           <a:solidFill>
-            <a:srgbClr val="FFFFFF"/>
+            <a:srgbClr val="F0ECE6"/>
           </a:solidFill>
-          <a:ln w="12700">
-            <a:solidFill>
-              <a:srgbClr val="E3E0D9"/>
-            </a:solidFill>
+          <a:ln>
+            <a:noFill/>
           </a:ln>
           <a:effectLst/>
         </p:spPr>
@@ -4394,8 +4209,8 @@
         </p:nvSpPr>
         <p:spPr>
           <a:xfrm>
-            <a:off x="8426500" y="3108960"/>
-            <a:ext cx="2613050" cy="2103120"/>
+            <a:off x="4521098" y="2578608"/>
+            <a:ext cx="3149498" cy="457200"/>
           </a:xfrm>
           <a:prstGeom prst="rect">
             <a:avLst/>
@@ -4409,73 +4224,173 @@
           <a:lstStyle/>
           <a:p>
             <a:pPr algn="l">
+              <a:spcAft>
+                <a:spcPts val="0"/>
+              </a:spcAft>
+            </a:pPr>
+            <a:r>
+              <a:rPr sz="1400" b="1">
+                <a:solidFill>
+                  <a:srgbClr val="B0402F"/>
+                </a:solidFill>
+                <a:latin typeface="Arial"/>
+              </a:rPr>
+              <a:t>02</a:t>
+            </a:r>
+          </a:p>
+        </p:txBody>
+      </p:sp>
+      <p:sp>
+        <p:nvSpPr>
+          <p:cNvPr id="12" name="TextBox 11"/>
+          <p:cNvSpPr txBox="1"/>
+          <p:nvPr/>
+        </p:nvSpPr>
+        <p:spPr>
+          <a:xfrm>
+            <a:off x="4521098" y="3035808"/>
+            <a:ext cx="3149498" cy="1828800"/>
+          </a:xfrm>
+          <a:prstGeom prst="rect">
+            <a:avLst/>
+          </a:prstGeom>
+          <a:noFill/>
+        </p:spPr>
+        <p:txBody>
+          <a:bodyPr wrap="square" anchor="t" lIns="0" rIns="0" tIns="0" bIns="0">
+            <a:spAutoFit/>
+          </a:bodyPr>
+          <a:lstStyle/>
+          <a:p>
+            <a:pPr algn="l">
+              <a:spcAft>
+                <a:spcPts val="1000"/>
+              </a:spcAft>
+            </a:pPr>
+            <a:r>
+              <a:rPr sz="2000" b="1">
+                <a:solidFill>
+                  <a:srgbClr val="17181A"/>
+                </a:solidFill>
+                <a:latin typeface="Arial"/>
+              </a:rPr>
+              <a:t>Marrow watches</a:t>
+            </a:r>
+          </a:p>
+          <a:p>
+            <a:pPr algn="l">
               <a:lnSpc>
-                <a:spcPct val="100000"/>
+                <a:spcPct val="140000"/>
               </a:lnSpc>
-              <a:spcBef>
+              <a:spcAft>
                 <a:spcPts val="0"/>
-              </a:spcBef>
+              </a:spcAft>
             </a:pPr>
             <a:r>
-              <a:rPr sz="3000" b="1">
+              <a:rPr sz="1500" b="0">
                 <a:solidFill>
-                  <a:srgbClr val="C2410C"/>
+                  <a:srgbClr val="5F6367"/>
+                </a:solidFill>
+                <a:latin typeface="Arial"/>
+              </a:rPr>
+              <a:t>It records which lines each test exercised, as the suite runs.</a:t>
+            </a:r>
+          </a:p>
+        </p:txBody>
+      </p:sp>
+      <p:sp>
+        <p:nvSpPr>
+          <p:cNvPr id="13" name="Rectangle 12"/>
+          <p:cNvSpPr/>
+          <p:nvPr/>
+        </p:nvSpPr>
+        <p:spPr>
+          <a:xfrm>
+            <a:off x="8127796" y="2395728"/>
+            <a:ext cx="3149498" cy="38100"/>
+          </a:xfrm>
+          <a:prstGeom prst="rect">
+            <a:avLst/>
+          </a:prstGeom>
+          <a:solidFill>
+            <a:srgbClr val="F0ECE6"/>
+          </a:solidFill>
+          <a:ln>
+            <a:noFill/>
+          </a:ln>
+          <a:effectLst/>
+        </p:spPr>
+        <p:style>
+          <a:lnRef idx="1">
+            <a:schemeClr val="accent1"/>
+          </a:lnRef>
+          <a:fillRef idx="3">
+            <a:schemeClr val="accent1"/>
+          </a:fillRef>
+          <a:effectRef idx="2">
+            <a:schemeClr val="accent1"/>
+          </a:effectRef>
+          <a:fontRef idx="minor">
+            <a:schemeClr val="lt1"/>
+          </a:fontRef>
+        </p:style>
+        <p:txBody>
+          <a:bodyPr rtlCol="0" anchor="ctr"/>
+          <a:lstStyle/>
+          <a:p>
+            <a:pPr algn="ctr"/>
+          </a:p>
+        </p:txBody>
+      </p:sp>
+      <p:sp>
+        <p:nvSpPr>
+          <p:cNvPr id="14" name="TextBox 13"/>
+          <p:cNvSpPr txBox="1"/>
+          <p:nvPr/>
+        </p:nvSpPr>
+        <p:spPr>
+          <a:xfrm>
+            <a:off x="8127796" y="2578608"/>
+            <a:ext cx="3149498" cy="457200"/>
+          </a:xfrm>
+          <a:prstGeom prst="rect">
+            <a:avLst/>
+          </a:prstGeom>
+          <a:noFill/>
+        </p:spPr>
+        <p:txBody>
+          <a:bodyPr wrap="square" anchor="t" lIns="0" rIns="0" tIns="0" bIns="0">
+            <a:spAutoFit/>
+          </a:bodyPr>
+          <a:lstStyle/>
+          <a:p>
+            <a:pPr algn="l">
+              <a:spcAft>
+                <a:spcPts val="0"/>
+              </a:spcAft>
+            </a:pPr>
+            <a:r>
+              <a:rPr sz="1400" b="1">
+                <a:solidFill>
+                  <a:srgbClr val="B0402F"/>
                 </a:solidFill>
                 <a:latin typeface="Arial"/>
               </a:rPr>
               <a:t>03</a:t>
             </a:r>
           </a:p>
-          <a:p>
-            <a:pPr algn="l">
-              <a:lnSpc>
-                <a:spcPct val="120000"/>
-              </a:lnSpc>
-              <a:spcBef>
-                <a:spcPts val="1000"/>
-              </a:spcBef>
-            </a:pPr>
-            <a:r>
-              <a:rPr sz="1900" b="1">
-                <a:solidFill>
-                  <a:srgbClr val="1A1A1F"/>
-                </a:solidFill>
-                <a:latin typeface="Arial"/>
-              </a:rPr>
-              <a:t>You get the map.</a:t>
-            </a:r>
-          </a:p>
-          <a:p>
-            <a:pPr algn="l">
-              <a:lnSpc>
-                <a:spcPct val="130000"/>
-              </a:lnSpc>
-              <a:spcBef>
-                <a:spcPts val="1000"/>
-              </a:spcBef>
-            </a:pPr>
-            <a:r>
-              <a:rPr sz="1500" b="0">
-                <a:solidFill>
-                  <a:srgbClr val="4A4A55"/>
-                </a:solidFill>
-                <a:latin typeface="Arial"/>
-              </a:rPr>
-              <a:t>An interactive test → code map, plus a list of dead tests and untested lines.</a:t>
-            </a:r>
-          </a:p>
-        </p:txBody>
-      </p:sp>
-      <p:sp>
-        <p:nvSpPr>
-          <p:cNvPr id="12" name="TextBox 11"/>
+        </p:txBody>
+      </p:sp>
+      <p:sp>
+        <p:nvSpPr>
+          <p:cNvPr id="15" name="TextBox 14"/>
           <p:cNvSpPr txBox="1"/>
           <p:nvPr/>
         </p:nvSpPr>
         <p:spPr>
           <a:xfrm>
-            <a:off x="10454335" y="6199632"/>
-            <a:ext cx="914400" cy="274320"/>
+            <a:off x="8127796" y="3035808"/>
+            <a:ext cx="3149498" cy="1828800"/>
           </a:xfrm>
           <a:prstGeom prst="rect">
             <a:avLst/>
@@ -4488,22 +4403,38 @@
           </a:bodyPr>
           <a:lstStyle/>
           <a:p>
-            <a:pPr algn="r">
-              <a:lnSpc>
-                <a:spcPct val="100000"/>
-              </a:lnSpc>
-              <a:spcBef>
-                <a:spcPts val="0"/>
-              </a:spcBef>
+            <a:pPr algn="l">
+              <a:spcAft>
+                <a:spcPts val="1000"/>
+              </a:spcAft>
             </a:pPr>
             <a:r>
-              <a:rPr sz="1100" b="0">
+              <a:rPr sz="2000" b="1">
                 <a:solidFill>
-                  <a:srgbClr val="9A9AA4"/>
+                  <a:srgbClr val="17181A"/>
                 </a:solidFill>
                 <a:latin typeface="Arial"/>
               </a:rPr>
-              <a:t>4</a:t>
+              <a:t>Read the map</a:t>
+            </a:r>
+          </a:p>
+          <a:p>
+            <a:pPr algn="l">
+              <a:lnSpc>
+                <a:spcPct val="140000"/>
+              </a:lnSpc>
+              <a:spcAft>
+                <a:spcPts val="0"/>
+              </a:spcAft>
+            </a:pPr>
+            <a:r>
+              <a:rPr sz="1500" b="0">
+                <a:solidFill>
+                  <a:srgbClr val="5F6367"/>
+                </a:solidFill>
+                <a:latin typeface="Arial"/>
+              </a:rPr>
+              <a:t>You get an interactive test→code map, plus a list of dead tests and untested lines.</a:t>
             </a:r>
           </a:p>
         </p:txBody>
@@ -4541,7 +4472,7 @@
             <a:avLst/>
           </a:prstGeom>
           <a:solidFill>
-            <a:srgbClr val="F7F6F3"/>
+            <a:srgbClr val="FAFAF8"/>
           </a:solidFill>
           <a:ln>
             <a:noFill/>
@@ -4578,8 +4509,8 @@
         </p:nvSpPr>
         <p:spPr>
           <a:xfrm>
-            <a:off x="822960" y="566928"/>
-            <a:ext cx="10545775" cy="274320"/>
+            <a:off x="914400" y="777240"/>
+            <a:ext cx="10362895" cy="1005840"/>
           </a:xfrm>
           <a:prstGeom prst="rect">
             <a:avLst/>
@@ -4594,84 +4525,40 @@
           <a:p>
             <a:pPr algn="ctr">
               <a:lnSpc>
-                <a:spcPct val="100000"/>
+                <a:spcPct val="105000"/>
               </a:lnSpc>
-              <a:spcBef>
+              <a:spcAft>
                 <a:spcPts val="0"/>
-              </a:spcBef>
+              </a:spcAft>
             </a:pPr>
             <a:r>
-              <a:rPr sz="1300" b="1">
+              <a:rPr sz="3800" b="1">
                 <a:solidFill>
-                  <a:srgbClr val="C2410C"/>
+                  <a:srgbClr val="17181A"/>
                 </a:solidFill>
                 <a:latin typeface="Arial"/>
               </a:rPr>
-              <a:t>GET STARTED</a:t>
-            </a:r>
-          </a:p>
-        </p:txBody>
-      </p:sp>
-      <p:sp>
-        <p:nvSpPr>
-          <p:cNvPr id="4" name="TextBox 3"/>
-          <p:cNvSpPr txBox="1"/>
+              <a:t>Install Marrow</a:t>
+            </a:r>
+          </a:p>
+        </p:txBody>
+      </p:sp>
+      <p:sp>
+        <p:nvSpPr>
+          <p:cNvPr id="4" name="Rectangle 3"/>
+          <p:cNvSpPr/>
           <p:nvPr/>
         </p:nvSpPr>
         <p:spPr>
           <a:xfrm>
-            <a:off x="822960" y="1234440"/>
-            <a:ext cx="10545775" cy="1371600"/>
+            <a:off x="5364327" y="1709928"/>
+            <a:ext cx="1463040" cy="50800"/>
           </a:xfrm>
           <a:prstGeom prst="rect">
             <a:avLst/>
           </a:prstGeom>
-          <a:noFill/>
-        </p:spPr>
-        <p:txBody>
-          <a:bodyPr wrap="square" anchor="t" lIns="0" rIns="0" tIns="0" bIns="0">
-            <a:spAutoFit/>
-          </a:bodyPr>
-          <a:lstStyle/>
-          <a:p>
-            <a:pPr algn="ctr">
-              <a:lnSpc>
-                <a:spcPct val="110000"/>
-              </a:lnSpc>
-              <a:spcBef>
-                <a:spcPts val="0"/>
-              </a:spcBef>
-            </a:pPr>
-            <a:r>
-              <a:rPr sz="4800" b="1">
-                <a:solidFill>
-                  <a:srgbClr val="1A1A1F"/>
-                </a:solidFill>
-                <a:latin typeface="Arial"/>
-              </a:rPr>
-              <a:t>Install Marrow.</a:t>
-            </a:r>
-          </a:p>
-        </p:txBody>
-      </p:sp>
-      <p:sp>
-        <p:nvSpPr>
-          <p:cNvPr id="5" name="Rounded Rectangle 4"/>
-          <p:cNvSpPr/>
-          <p:nvPr/>
-        </p:nvSpPr>
-        <p:spPr>
-          <a:xfrm>
-            <a:off x="3626967" y="2880360"/>
-            <a:ext cx="4937760" cy="914400"/>
-          </a:xfrm>
-          <a:prstGeom prst="roundRect">
-            <a:avLst>
-              <a:gd name="adj" fmla="val 22000"/>
-            </a:avLst>
-          </a:prstGeom>
           <a:solidFill>
-            <a:srgbClr val="1A1A1F"/>
+            <a:srgbClr val="B0402F"/>
           </a:solidFill>
           <a:ln>
             <a:noFill/>
@@ -4693,48 +4580,23 @@
           </a:fontRef>
         </p:style>
         <p:txBody>
-          <a:bodyPr rtlCol="0" anchor="ctr" wrap="square" lIns="0" rIns="0"/>
-          <a:lstStyle/>
-          <a:p>
-            <a:pPr algn="ctr">
-              <a:lnSpc>
-                <a:spcPct val="100000"/>
-              </a:lnSpc>
-              <a:spcBef>
-                <a:spcPts val="0"/>
-              </a:spcBef>
-            </a:pPr>
-            <a:r>
-              <a:rPr sz="2400" b="1">
-                <a:solidFill>
-                  <a:srgbClr val="9A9AA4"/>
-                </a:solidFill>
-                <a:latin typeface="Consolas"/>
-              </a:rPr>
-              <a:t>$ </a:t>
-            </a:r>
-            <a:r>
-              <a:rPr sz="2400" b="1">
-                <a:solidFill>
-                  <a:srgbClr val="FFFFFF"/>
-                </a:solidFill>
-                <a:latin typeface="Consolas"/>
-              </a:rPr>
-              <a:t>pipx install marrow</a:t>
-            </a:r>
-          </a:p>
-        </p:txBody>
-      </p:sp>
-      <p:sp>
-        <p:nvSpPr>
-          <p:cNvPr id="6" name="TextBox 5"/>
+          <a:bodyPr rtlCol="0" anchor="ctr"/>
+          <a:lstStyle/>
+          <a:p>
+            <a:pPr algn="ctr"/>
+          </a:p>
+        </p:txBody>
+      </p:sp>
+      <p:sp>
+        <p:nvSpPr>
+          <p:cNvPr id="5" name="TextBox 4"/>
           <p:cNvSpPr txBox="1"/>
           <p:nvPr/>
         </p:nvSpPr>
         <p:spPr>
           <a:xfrm>
-            <a:off x="822960" y="4343400"/>
-            <a:ext cx="10545775" cy="548640"/>
+            <a:off x="10362895" y="6199632"/>
+            <a:ext cx="914400" cy="274320"/>
           </a:xfrm>
           <a:prstGeom prst="rect">
             <a:avLst/>
@@ -4747,42 +4609,41 @@
           </a:bodyPr>
           <a:lstStyle/>
           <a:p>
-            <a:pPr algn="ctr">
-              <a:lnSpc>
-                <a:spcPct val="120000"/>
-              </a:lnSpc>
-              <a:spcBef>
+            <a:pPr algn="r">
+              <a:spcAft>
                 <a:spcPts val="0"/>
-              </a:spcBef>
+              </a:spcAft>
             </a:pPr>
             <a:r>
-              <a:rPr sz="2200" b="0">
+              <a:rPr sz="1100" b="0">
                 <a:solidFill>
-                  <a:srgbClr val="4A4A55"/>
+                  <a:srgbClr val="5F6367"/>
                 </a:solidFill>
                 <a:latin typeface="Arial"/>
               </a:rPr>
-              <a:t>Works with pytest, Jest, and go test.</a:t>
-            </a:r>
-          </a:p>
-        </p:txBody>
-      </p:sp>
-      <p:sp>
-        <p:nvSpPr>
-          <p:cNvPr id="7" name="Rectangle 6"/>
+              <a:t>5/5</a:t>
+            </a:r>
+          </a:p>
+        </p:txBody>
+      </p:sp>
+      <p:sp>
+        <p:nvSpPr>
+          <p:cNvPr id="6" name="Rounded Rectangle 5"/>
           <p:cNvSpPr/>
           <p:nvPr/>
         </p:nvSpPr>
         <p:spPr>
           <a:xfrm>
-            <a:off x="5592927" y="5257800"/>
-            <a:ext cx="1005840" cy="44450"/>
-          </a:xfrm>
-          <a:prstGeom prst="rect">
-            <a:avLst/>
+            <a:off x="4175607" y="2880360"/>
+            <a:ext cx="3840480" cy="566928"/>
+          </a:xfrm>
+          <a:prstGeom prst="roundRect">
+            <a:avLst>
+              <a:gd name="adj" fmla="val 18000"/>
+            </a:avLst>
           </a:prstGeom>
           <a:solidFill>
-            <a:srgbClr val="C2410C"/>
+            <a:srgbClr val="F0ECE6"/>
           </a:solidFill>
           <a:ln>
             <a:noFill/>
@@ -4804,23 +4665,36 @@
           </a:fontRef>
         </p:style>
         <p:txBody>
-          <a:bodyPr rtlCol="0" anchor="ctr"/>
-          <a:lstStyle/>
-          <a:p>
-            <a:pPr algn="ctr"/>
-          </a:p>
-        </p:txBody>
-      </p:sp>
-      <p:sp>
-        <p:nvSpPr>
-          <p:cNvPr id="8" name="TextBox 7"/>
+          <a:bodyPr rtlCol="0" anchor="ctr" wrap="square" lIns="164592" rIns="164592" tIns="0" bIns="0"/>
+          <a:lstStyle/>
+          <a:p>
+            <a:pPr algn="ctr">
+              <a:spcAft>
+                <a:spcPts val="0"/>
+              </a:spcAft>
+            </a:pPr>
+            <a:r>
+              <a:rPr sz="2000" b="0">
+                <a:solidFill>
+                  <a:srgbClr val="17181A"/>
+                </a:solidFill>
+                <a:latin typeface="Consolas"/>
+              </a:rPr>
+              <a:t>pipx install marrow</a:t>
+            </a:r>
+          </a:p>
+        </p:txBody>
+      </p:sp>
+      <p:sp>
+        <p:nvSpPr>
+          <p:cNvPr id="7" name="TextBox 6"/>
           <p:cNvSpPr txBox="1"/>
           <p:nvPr/>
         </p:nvSpPr>
         <p:spPr>
           <a:xfrm>
-            <a:off x="10454335" y="6199632"/>
-            <a:ext cx="914400" cy="274320"/>
+            <a:off x="914400" y="3877056"/>
+            <a:ext cx="10362895" cy="1280160"/>
           </a:xfrm>
           <a:prstGeom prst="rect">
             <a:avLst/>
@@ -4833,22 +4707,35 @@
           </a:bodyPr>
           <a:lstStyle/>
           <a:p>
-            <a:pPr algn="r">
-              <a:lnSpc>
-                <a:spcPct val="100000"/>
-              </a:lnSpc>
-              <a:spcBef>
-                <a:spcPts val="0"/>
-              </a:spcBef>
+            <a:pPr algn="ctr">
+              <a:spcAft>
+                <a:spcPts val="1400"/>
+              </a:spcAft>
             </a:pPr>
             <a:r>
-              <a:rPr sz="1100" b="0">
+              <a:rPr sz="2300" b="1">
                 <a:solidFill>
-                  <a:srgbClr val="9A9AA4"/>
+                  <a:srgbClr val="17181A"/>
                 </a:solidFill>
                 <a:latin typeface="Arial"/>
               </a:rPr>
-              <a:t>5</a:t>
+              <a:t>Works with pytest, Jest, go test.</a:t>
+            </a:r>
+          </a:p>
+          <a:p>
+            <a:pPr algn="ctr">
+              <a:spcAft>
+                <a:spcPts val="0"/>
+              </a:spcAft>
+            </a:pPr>
+            <a:r>
+              <a:rPr sz="1500" b="0">
+                <a:solidFill>
+                  <a:srgbClr val="5F6367"/>
+                </a:solidFill>
+                <a:latin typeface="Arial"/>
+              </a:rPr>
+              <a:t>Point it at the suite you already have, and see the real map.</a:t>
             </a:r>
           </a:p>
         </p:txBody>
